--- a/정찬성/96.화면구성PPT(이민석)/화면데시보드(모델별)이민석.pptx
+++ b/정찬성/96.화면구성PPT(이민석)/화면데시보드(모델별)이민석.pptx
@@ -7,16 +7,17 @@
   <p:sldIdLst>
     <p:sldId id="256" r:id="rId2"/>
     <p:sldId id="278" r:id="rId3"/>
-    <p:sldId id="274" r:id="rId4"/>
-    <p:sldId id="281" r:id="rId5"/>
-    <p:sldId id="280" r:id="rId6"/>
-    <p:sldId id="279" r:id="rId7"/>
-    <p:sldId id="275" r:id="rId8"/>
-    <p:sldId id="276" r:id="rId9"/>
-    <p:sldId id="277" r:id="rId10"/>
-    <p:sldId id="271" r:id="rId11"/>
-    <p:sldId id="272" r:id="rId12"/>
-    <p:sldId id="273" r:id="rId13"/>
+    <p:sldId id="282" r:id="rId4"/>
+    <p:sldId id="274" r:id="rId5"/>
+    <p:sldId id="281" r:id="rId6"/>
+    <p:sldId id="280" r:id="rId7"/>
+    <p:sldId id="279" r:id="rId8"/>
+    <p:sldId id="275" r:id="rId9"/>
+    <p:sldId id="276" r:id="rId10"/>
+    <p:sldId id="277" r:id="rId11"/>
+    <p:sldId id="271" r:id="rId12"/>
+    <p:sldId id="272" r:id="rId13"/>
+    <p:sldId id="273" r:id="rId14"/>
   </p:sldIdLst>
   <p:sldSz cx="12192000" cy="6858000"/>
   <p:notesSz cx="6858000" cy="9144000"/>
@@ -3972,10 +3973,628 @@
   <p:clrMapOvr>
     <a:masterClrMapping/>
   </p:clrMapOvr>
+  <p:timing>
+    <p:tnLst>
+      <p:par>
+        <p:cTn id="1" dur="indefinite" restart="never" nodeType="tmRoot"/>
+      </p:par>
+    </p:tnLst>
+  </p:timing>
 </p:sld>
 </file>
 
 <file path=ppt/slides/slide10.xml><?xml version="1.0" encoding="utf-8"?>
+<p:sld xmlns:a="http://schemas.openxmlformats.org/drawingml/2006/main" xmlns:r="http://schemas.openxmlformats.org/officeDocument/2006/relationships" xmlns:p="http://schemas.openxmlformats.org/presentationml/2006/main">
+  <p:cSld>
+    <p:spTree>
+      <p:nvGrpSpPr>
+        <p:cNvPr id="1" name="">
+          <a:extLst>
+            <a:ext uri="{FF2B5EF4-FFF2-40B4-BE49-F238E27FC236}">
+              <a16:creationId xmlns:a16="http://schemas.microsoft.com/office/drawing/2014/main" id="{B5A1B226-C314-3CD6-9455-19768773A067}"/>
+            </a:ext>
+          </a:extLst>
+        </p:cNvPr>
+        <p:cNvGrpSpPr/>
+        <p:nvPr/>
+      </p:nvGrpSpPr>
+      <p:grpSpPr>
+        <a:xfrm>
+          <a:off x="0" y="0"/>
+          <a:ext cx="0" cy="0"/>
+          <a:chOff x="0" y="0"/>
+          <a:chExt cx="0" cy="0"/>
+        </a:xfrm>
+      </p:grpSpPr>
+      <p:pic>
+        <p:nvPicPr>
+          <p:cNvPr id="33" name="그림 32">
+            <a:extLst>
+              <a:ext uri="{FF2B5EF4-FFF2-40B4-BE49-F238E27FC236}">
+                <a16:creationId xmlns:a16="http://schemas.microsoft.com/office/drawing/2014/main" id="{0CA7AF1B-6E0D-6E51-C575-5CC005067983}"/>
+              </a:ext>
+            </a:extLst>
+          </p:cNvPr>
+          <p:cNvPicPr>
+            <a:picLocks noChangeAspect="1"/>
+          </p:cNvPicPr>
+          <p:nvPr/>
+        </p:nvPicPr>
+        <p:blipFill>
+          <a:blip r:embed="rId2" cstate="hqprint">
+            <a:extLst>
+              <a:ext uri="{28A0092B-C50C-407E-A947-70E740481C1C}">
+                <a14:useLocalDpi xmlns:a14="http://schemas.microsoft.com/office/drawing/2010/main" val="0"/>
+              </a:ext>
+            </a:extLst>
+          </a:blip>
+          <a:stretch>
+            <a:fillRect/>
+          </a:stretch>
+        </p:blipFill>
+        <p:spPr>
+          <a:xfrm>
+            <a:off x="201691" y="2642346"/>
+            <a:ext cx="2884409" cy="1882120"/>
+          </a:xfrm>
+          <a:prstGeom prst="rect">
+            <a:avLst/>
+          </a:prstGeom>
+        </p:spPr>
+      </p:pic>
+      <p:pic>
+        <p:nvPicPr>
+          <p:cNvPr id="39" name="그림 38">
+            <a:extLst>
+              <a:ext uri="{FF2B5EF4-FFF2-40B4-BE49-F238E27FC236}">
+                <a16:creationId xmlns:a16="http://schemas.microsoft.com/office/drawing/2014/main" id="{E4821260-5B77-4153-C580-29CAE4A155DB}"/>
+              </a:ext>
+            </a:extLst>
+          </p:cNvPr>
+          <p:cNvPicPr>
+            <a:picLocks noChangeAspect="1"/>
+          </p:cNvPicPr>
+          <p:nvPr/>
+        </p:nvPicPr>
+        <p:blipFill>
+          <a:blip r:embed="rId3" cstate="hqprint">
+            <a:extLst>
+              <a:ext uri="{28A0092B-C50C-407E-A947-70E740481C1C}">
+                <a14:useLocalDpi xmlns:a14="http://schemas.microsoft.com/office/drawing/2010/main" val="0"/>
+              </a:ext>
+            </a:extLst>
+          </a:blip>
+          <a:stretch>
+            <a:fillRect/>
+          </a:stretch>
+        </p:blipFill>
+        <p:spPr>
+          <a:xfrm>
+            <a:off x="4087945" y="2722936"/>
+            <a:ext cx="2884410" cy="1611922"/>
+          </a:xfrm>
+          <a:prstGeom prst="rect">
+            <a:avLst/>
+          </a:prstGeom>
+        </p:spPr>
+      </p:pic>
+      <p:pic>
+        <p:nvPicPr>
+          <p:cNvPr id="41" name="그림 40">
+            <a:extLst>
+              <a:ext uri="{FF2B5EF4-FFF2-40B4-BE49-F238E27FC236}">
+                <a16:creationId xmlns:a16="http://schemas.microsoft.com/office/drawing/2014/main" id="{553CF7CE-FE1D-FD0F-C7D8-FABE61A840BB}"/>
+              </a:ext>
+            </a:extLst>
+          </p:cNvPr>
+          <p:cNvPicPr>
+            <a:picLocks noChangeAspect="1"/>
+          </p:cNvPicPr>
+          <p:nvPr/>
+        </p:nvPicPr>
+        <p:blipFill>
+          <a:blip r:embed="rId4"/>
+          <a:stretch>
+            <a:fillRect/>
+          </a:stretch>
+        </p:blipFill>
+        <p:spPr>
+          <a:xfrm>
+            <a:off x="584538" y="508616"/>
+            <a:ext cx="1009791" cy="390580"/>
+          </a:xfrm>
+          <a:prstGeom prst="rect">
+            <a:avLst/>
+          </a:prstGeom>
+        </p:spPr>
+      </p:pic>
+      <p:sp>
+        <p:nvSpPr>
+          <p:cNvPr id="42" name="TextBox 41">
+            <a:extLst>
+              <a:ext uri="{FF2B5EF4-FFF2-40B4-BE49-F238E27FC236}">
+                <a16:creationId xmlns:a16="http://schemas.microsoft.com/office/drawing/2014/main" id="{C797A200-B448-42CC-2514-178A945092F5}"/>
+              </a:ext>
+            </a:extLst>
+          </p:cNvPr>
+          <p:cNvSpPr txBox="1"/>
+          <p:nvPr/>
+        </p:nvSpPr>
+        <p:spPr>
+          <a:xfrm>
+            <a:off x="524181" y="139284"/>
+            <a:ext cx="877163" cy="369332"/>
+          </a:xfrm>
+          <a:prstGeom prst="rect">
+            <a:avLst/>
+          </a:prstGeom>
+          <a:noFill/>
+        </p:spPr>
+        <p:txBody>
+          <a:bodyPr wrap="none" rtlCol="0">
+            <a:spAutoFit/>
+          </a:bodyPr>
+          <a:lstStyle/>
+          <a:p>
+            <a:r>
+              <a:rPr lang="ko-KR" altLang="en-US" dirty="0"/>
+              <a:t>업무명</a:t>
+            </a:r>
+          </a:p>
+        </p:txBody>
+      </p:sp>
+      <p:sp>
+        <p:nvSpPr>
+          <p:cNvPr id="43" name="TextBox 42">
+            <a:extLst>
+              <a:ext uri="{FF2B5EF4-FFF2-40B4-BE49-F238E27FC236}">
+                <a16:creationId xmlns:a16="http://schemas.microsoft.com/office/drawing/2014/main" id="{777054CC-A724-9A4C-19DC-8191C3A1B09C}"/>
+              </a:ext>
+            </a:extLst>
+          </p:cNvPr>
+          <p:cNvSpPr txBox="1"/>
+          <p:nvPr/>
+        </p:nvSpPr>
+        <p:spPr>
+          <a:xfrm>
+            <a:off x="584538" y="926199"/>
+            <a:ext cx="1285929" cy="369332"/>
+          </a:xfrm>
+          <a:prstGeom prst="rect">
+            <a:avLst/>
+          </a:prstGeom>
+          <a:noFill/>
+        </p:spPr>
+        <p:txBody>
+          <a:bodyPr wrap="none" rtlCol="0">
+            <a:spAutoFit/>
+          </a:bodyPr>
+          <a:lstStyle/>
+          <a:p>
+            <a:r>
+              <a:rPr lang="en-US" altLang="ko-KR" dirty="0"/>
+              <a:t>1.</a:t>
+            </a:r>
+            <a:r>
+              <a:rPr lang="ko-KR" altLang="en-US" dirty="0" err="1"/>
+              <a:t>산탄데르</a:t>
+            </a:r>
+            <a:endParaRPr lang="en-US" altLang="ko-KR" dirty="0"/>
+          </a:p>
+        </p:txBody>
+      </p:sp>
+      <p:pic>
+        <p:nvPicPr>
+          <p:cNvPr id="45" name="그림 44">
+            <a:extLst>
+              <a:ext uri="{FF2B5EF4-FFF2-40B4-BE49-F238E27FC236}">
+                <a16:creationId xmlns:a16="http://schemas.microsoft.com/office/drawing/2014/main" id="{AC2C9352-5603-1B0C-5C91-04900C0EB80F}"/>
+              </a:ext>
+            </a:extLst>
+          </p:cNvPr>
+          <p:cNvPicPr>
+            <a:picLocks noChangeAspect="1"/>
+          </p:cNvPicPr>
+          <p:nvPr/>
+        </p:nvPicPr>
+        <p:blipFill>
+          <a:blip r:embed="rId4"/>
+          <a:stretch>
+            <a:fillRect/>
+          </a:stretch>
+        </p:blipFill>
+        <p:spPr>
+          <a:xfrm>
+            <a:off x="3540326" y="497200"/>
+            <a:ext cx="1009791" cy="390580"/>
+          </a:xfrm>
+          <a:prstGeom prst="rect">
+            <a:avLst/>
+          </a:prstGeom>
+        </p:spPr>
+      </p:pic>
+      <p:sp>
+        <p:nvSpPr>
+          <p:cNvPr id="47" name="TextBox 46">
+            <a:extLst>
+              <a:ext uri="{FF2B5EF4-FFF2-40B4-BE49-F238E27FC236}">
+                <a16:creationId xmlns:a16="http://schemas.microsoft.com/office/drawing/2014/main" id="{051FE3CC-36AF-ACD1-D9F3-4CBAD71688E1}"/>
+              </a:ext>
+            </a:extLst>
+          </p:cNvPr>
+          <p:cNvSpPr txBox="1"/>
+          <p:nvPr/>
+        </p:nvSpPr>
+        <p:spPr>
+          <a:xfrm>
+            <a:off x="3479969" y="127868"/>
+            <a:ext cx="877163" cy="369332"/>
+          </a:xfrm>
+          <a:prstGeom prst="rect">
+            <a:avLst/>
+          </a:prstGeom>
+          <a:noFill/>
+        </p:spPr>
+        <p:txBody>
+          <a:bodyPr wrap="none" rtlCol="0">
+            <a:spAutoFit/>
+          </a:bodyPr>
+          <a:lstStyle/>
+          <a:p>
+            <a:r>
+              <a:rPr lang="ko-KR" altLang="en-US" dirty="0"/>
+              <a:t>모델명</a:t>
+            </a:r>
+          </a:p>
+        </p:txBody>
+      </p:sp>
+      <p:sp>
+        <p:nvSpPr>
+          <p:cNvPr id="49" name="TextBox 48">
+            <a:extLst>
+              <a:ext uri="{FF2B5EF4-FFF2-40B4-BE49-F238E27FC236}">
+                <a16:creationId xmlns:a16="http://schemas.microsoft.com/office/drawing/2014/main" id="{DA52A276-9A44-7532-F2E7-25F933F78367}"/>
+              </a:ext>
+            </a:extLst>
+          </p:cNvPr>
+          <p:cNvSpPr txBox="1"/>
+          <p:nvPr/>
+        </p:nvSpPr>
+        <p:spPr>
+          <a:xfrm>
+            <a:off x="3540326" y="914783"/>
+            <a:ext cx="1882247" cy="646331"/>
+          </a:xfrm>
+          <a:prstGeom prst="rect">
+            <a:avLst/>
+          </a:prstGeom>
+          <a:noFill/>
+        </p:spPr>
+        <p:txBody>
+          <a:bodyPr wrap="none" rtlCol="0">
+            <a:spAutoFit/>
+          </a:bodyPr>
+          <a:lstStyle/>
+          <a:p>
+            <a:r>
+              <a:rPr lang="en-US" altLang="ko-KR" dirty="0"/>
+              <a:t>4.RF</a:t>
+            </a:r>
+          </a:p>
+          <a:p>
+            <a:r>
+              <a:rPr lang="ko-KR" altLang="en-US" dirty="0"/>
+              <a:t>전체항목은 없음</a:t>
+            </a:r>
+          </a:p>
+        </p:txBody>
+      </p:sp>
+      <p:sp>
+        <p:nvSpPr>
+          <p:cNvPr id="51" name="TextBox 50">
+            <a:extLst>
+              <a:ext uri="{FF2B5EF4-FFF2-40B4-BE49-F238E27FC236}">
+                <a16:creationId xmlns:a16="http://schemas.microsoft.com/office/drawing/2014/main" id="{17CCE424-E54B-6A7F-F15A-31D643370069}"/>
+              </a:ext>
+            </a:extLst>
+          </p:cNvPr>
+          <p:cNvSpPr txBox="1"/>
+          <p:nvPr/>
+        </p:nvSpPr>
+        <p:spPr>
+          <a:xfrm>
+            <a:off x="5182212" y="433440"/>
+            <a:ext cx="1338828" cy="369332"/>
+          </a:xfrm>
+          <a:prstGeom prst="rect">
+            <a:avLst/>
+          </a:prstGeom>
+          <a:noFill/>
+        </p:spPr>
+        <p:txBody>
+          <a:bodyPr wrap="none" rtlCol="0">
+            <a:spAutoFit/>
+          </a:bodyPr>
+          <a:lstStyle/>
+          <a:p>
+            <a:r>
+              <a:rPr lang="ko-KR" altLang="en-US" dirty="0"/>
+              <a:t>전처리조회</a:t>
+            </a:r>
+          </a:p>
+        </p:txBody>
+      </p:sp>
+      <p:pic>
+        <p:nvPicPr>
+          <p:cNvPr id="53" name="그림 52">
+            <a:extLst>
+              <a:ext uri="{FF2B5EF4-FFF2-40B4-BE49-F238E27FC236}">
+                <a16:creationId xmlns:a16="http://schemas.microsoft.com/office/drawing/2014/main" id="{F5B93140-26CC-E46C-069D-B2A4296C0C9A}"/>
+              </a:ext>
+            </a:extLst>
+          </p:cNvPr>
+          <p:cNvPicPr>
+            <a:picLocks noChangeAspect="1"/>
+          </p:cNvPicPr>
+          <p:nvPr/>
+        </p:nvPicPr>
+        <p:blipFill>
+          <a:blip r:embed="rId5" cstate="hqprint">
+            <a:extLst>
+              <a:ext uri="{28A0092B-C50C-407E-A947-70E740481C1C}">
+                <a14:useLocalDpi xmlns:a14="http://schemas.microsoft.com/office/drawing/2010/main" val="0"/>
+              </a:ext>
+            </a:extLst>
+          </a:blip>
+          <a:stretch>
+            <a:fillRect/>
+          </a:stretch>
+        </p:blipFill>
+        <p:spPr>
+          <a:xfrm>
+            <a:off x="201691" y="4524466"/>
+            <a:ext cx="2884409" cy="2041556"/>
+          </a:xfrm>
+          <a:prstGeom prst="rect">
+            <a:avLst/>
+          </a:prstGeom>
+        </p:spPr>
+      </p:pic>
+      <p:pic>
+        <p:nvPicPr>
+          <p:cNvPr id="55" name="그림 54">
+            <a:extLst>
+              <a:ext uri="{FF2B5EF4-FFF2-40B4-BE49-F238E27FC236}">
+                <a16:creationId xmlns:a16="http://schemas.microsoft.com/office/drawing/2014/main" id="{D894951B-7CBB-41EF-CBF7-DCB3B6D8D234}"/>
+              </a:ext>
+            </a:extLst>
+          </p:cNvPr>
+          <p:cNvPicPr>
+            <a:picLocks noChangeAspect="1"/>
+          </p:cNvPicPr>
+          <p:nvPr/>
+        </p:nvPicPr>
+        <p:blipFill>
+          <a:blip r:embed="rId6" cstate="hqprint">
+            <a:extLst>
+              <a:ext uri="{28A0092B-C50C-407E-A947-70E740481C1C}">
+                <a14:useLocalDpi xmlns:a14="http://schemas.microsoft.com/office/drawing/2010/main" val="0"/>
+              </a:ext>
+            </a:extLst>
+          </a:blip>
+          <a:stretch>
+            <a:fillRect/>
+          </a:stretch>
+        </p:blipFill>
+        <p:spPr>
+          <a:xfrm>
+            <a:off x="4357132" y="4437229"/>
+            <a:ext cx="2615221" cy="2041557"/>
+          </a:xfrm>
+          <a:prstGeom prst="rect">
+            <a:avLst/>
+          </a:prstGeom>
+        </p:spPr>
+      </p:pic>
+      <p:sp>
+        <p:nvSpPr>
+          <p:cNvPr id="57" name="TextBox 56">
+            <a:extLst>
+              <a:ext uri="{FF2B5EF4-FFF2-40B4-BE49-F238E27FC236}">
+                <a16:creationId xmlns:a16="http://schemas.microsoft.com/office/drawing/2014/main" id="{85298108-A6C6-5D43-A38E-8B7FE49EA6C8}"/>
+              </a:ext>
+            </a:extLst>
+          </p:cNvPr>
+          <p:cNvSpPr txBox="1"/>
+          <p:nvPr/>
+        </p:nvSpPr>
+        <p:spPr>
+          <a:xfrm>
+            <a:off x="9195337" y="1586099"/>
+            <a:ext cx="1651414" cy="369332"/>
+          </a:xfrm>
+          <a:prstGeom prst="rect">
+            <a:avLst/>
+          </a:prstGeom>
+          <a:noFill/>
+        </p:spPr>
+        <p:txBody>
+          <a:bodyPr wrap="none" rtlCol="0">
+            <a:spAutoFit/>
+          </a:bodyPr>
+          <a:lstStyle/>
+          <a:p>
+            <a:r>
+              <a:rPr lang="ko-KR" altLang="en-US" dirty="0"/>
+              <a:t>모델 수행결과</a:t>
+            </a:r>
+          </a:p>
+        </p:txBody>
+      </p:sp>
+      <p:sp>
+        <p:nvSpPr>
+          <p:cNvPr id="58" name="TextBox 57">
+            <a:extLst>
+              <a:ext uri="{FF2B5EF4-FFF2-40B4-BE49-F238E27FC236}">
+                <a16:creationId xmlns:a16="http://schemas.microsoft.com/office/drawing/2014/main" id="{75797828-7CAC-06E0-B61A-B8FEFDC7E499}"/>
+              </a:ext>
+            </a:extLst>
+          </p:cNvPr>
+          <p:cNvSpPr txBox="1"/>
+          <p:nvPr/>
+        </p:nvSpPr>
+        <p:spPr>
+          <a:xfrm>
+            <a:off x="5107239" y="1514947"/>
+            <a:ext cx="2656496" cy="369332"/>
+          </a:xfrm>
+          <a:prstGeom prst="rect">
+            <a:avLst/>
+          </a:prstGeom>
+          <a:noFill/>
+        </p:spPr>
+        <p:txBody>
+          <a:bodyPr wrap="none" rtlCol="0">
+            <a:spAutoFit/>
+          </a:bodyPr>
+          <a:lstStyle/>
+          <a:p>
+            <a:r>
+              <a:rPr lang="ko-KR" altLang="en-US" dirty="0" err="1"/>
+              <a:t>전처리</a:t>
+            </a:r>
+            <a:r>
+              <a:rPr lang="ko-KR" altLang="en-US" dirty="0"/>
+              <a:t> 데이터 검증결과</a:t>
+            </a:r>
+          </a:p>
+        </p:txBody>
+      </p:sp>
+      <p:sp>
+        <p:nvSpPr>
+          <p:cNvPr id="61" name="TextBox 60">
+            <a:extLst>
+              <a:ext uri="{FF2B5EF4-FFF2-40B4-BE49-F238E27FC236}">
+                <a16:creationId xmlns:a16="http://schemas.microsoft.com/office/drawing/2014/main" id="{5D0F40CA-E4E4-F919-0D50-94CC73B67A8E}"/>
+              </a:ext>
+            </a:extLst>
+          </p:cNvPr>
+          <p:cNvSpPr txBox="1"/>
+          <p:nvPr/>
+        </p:nvSpPr>
+        <p:spPr>
+          <a:xfrm>
+            <a:off x="7763735" y="317500"/>
+            <a:ext cx="1651414" cy="369332"/>
+          </a:xfrm>
+          <a:prstGeom prst="rect">
+            <a:avLst/>
+          </a:prstGeom>
+          <a:noFill/>
+        </p:spPr>
+        <p:txBody>
+          <a:bodyPr wrap="none" rtlCol="0">
+            <a:spAutoFit/>
+          </a:bodyPr>
+          <a:lstStyle/>
+          <a:p>
+            <a:r>
+              <a:rPr lang="ko-KR" altLang="en-US" dirty="0" err="1"/>
+              <a:t>산탄데르</a:t>
+            </a:r>
+            <a:r>
+              <a:rPr lang="ko-KR" altLang="en-US" dirty="0"/>
+              <a:t> 기준</a:t>
+            </a:r>
+          </a:p>
+        </p:txBody>
+      </p:sp>
+      <p:sp>
+        <p:nvSpPr>
+          <p:cNvPr id="64" name="TextBox 63">
+            <a:extLst>
+              <a:ext uri="{FF2B5EF4-FFF2-40B4-BE49-F238E27FC236}">
+                <a16:creationId xmlns:a16="http://schemas.microsoft.com/office/drawing/2014/main" id="{91757298-2DC2-4EC0-063C-6B155978B008}"/>
+              </a:ext>
+            </a:extLst>
+          </p:cNvPr>
+          <p:cNvSpPr txBox="1"/>
+          <p:nvPr/>
+        </p:nvSpPr>
+        <p:spPr>
+          <a:xfrm>
+            <a:off x="9455696" y="2151347"/>
+            <a:ext cx="565348" cy="369332"/>
+          </a:xfrm>
+          <a:prstGeom prst="rect">
+            <a:avLst/>
+          </a:prstGeom>
+          <a:noFill/>
+        </p:spPr>
+        <p:txBody>
+          <a:bodyPr wrap="none" rtlCol="0">
+            <a:spAutoFit/>
+          </a:bodyPr>
+          <a:lstStyle/>
+          <a:p>
+            <a:r>
+              <a:rPr lang="en-US" altLang="ko-KR" dirty="0"/>
+              <a:t>Roc</a:t>
+            </a:r>
+            <a:endParaRPr lang="ko-KR" altLang="en-US" dirty="0"/>
+          </a:p>
+        </p:txBody>
+      </p:sp>
+      <p:pic>
+        <p:nvPicPr>
+          <p:cNvPr id="4" name="그림 3">
+            <a:extLst>
+              <a:ext uri="{FF2B5EF4-FFF2-40B4-BE49-F238E27FC236}">
+                <a16:creationId xmlns:a16="http://schemas.microsoft.com/office/drawing/2014/main" id="{E5F90F59-0FDF-C94E-8704-2404EE4AC01A}"/>
+              </a:ext>
+            </a:extLst>
+          </p:cNvPr>
+          <p:cNvPicPr>
+            <a:picLocks noChangeAspect="1"/>
+          </p:cNvPicPr>
+          <p:nvPr/>
+        </p:nvPicPr>
+        <p:blipFill>
+          <a:blip r:embed="rId7" cstate="hqprint">
+            <a:extLst>
+              <a:ext uri="{28A0092B-C50C-407E-A947-70E740481C1C}">
+                <a14:useLocalDpi xmlns:a14="http://schemas.microsoft.com/office/drawing/2010/main" val="0"/>
+              </a:ext>
+            </a:extLst>
+          </a:blip>
+          <a:stretch>
+            <a:fillRect/>
+          </a:stretch>
+        </p:blipFill>
+        <p:spPr>
+          <a:xfrm>
+            <a:off x="7726495" y="2916452"/>
+            <a:ext cx="3763220" cy="3216028"/>
+          </a:xfrm>
+          <a:prstGeom prst="rect">
+            <a:avLst/>
+          </a:prstGeom>
+        </p:spPr>
+      </p:pic>
+    </p:spTree>
+    <p:extLst>
+      <p:ext uri="{BB962C8B-B14F-4D97-AF65-F5344CB8AC3E}">
+        <p14:creationId xmlns:p14="http://schemas.microsoft.com/office/powerpoint/2010/main" val="1394182071"/>
+      </p:ext>
+    </p:extLst>
+  </p:cSld>
+  <p:clrMapOvr>
+    <a:masterClrMapping/>
+  </p:clrMapOvr>
+</p:sld>
+</file>
+
+<file path=ppt/slides/slide11.xml><?xml version="1.0" encoding="utf-8"?>
 <p:sld xmlns:a="http://schemas.openxmlformats.org/drawingml/2006/main" xmlns:r="http://schemas.openxmlformats.org/officeDocument/2006/relationships" xmlns:p="http://schemas.openxmlformats.org/presentationml/2006/main">
   <p:cSld>
     <p:spTree>
@@ -4596,7 +5215,7 @@
 </p:sld>
 </file>
 
-<file path=ppt/slides/slide11.xml><?xml version="1.0" encoding="utf-8"?>
+<file path=ppt/slides/slide12.xml><?xml version="1.0" encoding="utf-8"?>
 <p:sld xmlns:a="http://schemas.openxmlformats.org/drawingml/2006/main" xmlns:r="http://schemas.openxmlformats.org/officeDocument/2006/relationships" xmlns:p="http://schemas.openxmlformats.org/presentationml/2006/main">
   <p:cSld>
     <p:spTree>
@@ -5217,7 +5836,7 @@
 </p:sld>
 </file>
 
-<file path=ppt/slides/slide12.xml><?xml version="1.0" encoding="utf-8"?>
+<file path=ppt/slides/slide13.xml><?xml version="1.0" encoding="utf-8"?>
 <p:sld xmlns:a="http://schemas.openxmlformats.org/drawingml/2006/main" xmlns:r="http://schemas.openxmlformats.org/officeDocument/2006/relationships" xmlns:p="http://schemas.openxmlformats.org/presentationml/2006/main">
   <p:cSld>
     <p:spTree>
@@ -6490,6 +7109,13 @@
   <p:clrMapOvr>
     <a:masterClrMapping/>
   </p:clrMapOvr>
+  <p:timing>
+    <p:tnLst>
+      <p:par>
+        <p:cTn id="1" dur="indefinite" restart="never" nodeType="tmRoot"/>
+      </p:par>
+    </p:tnLst>
+  </p:timing>
 </p:sld>
 </file>
 
@@ -6501,7 +7127,7 @@
         <p:cNvPr id="1" name="">
           <a:extLst>
             <a:ext uri="{FF2B5EF4-FFF2-40B4-BE49-F238E27FC236}">
-              <a16:creationId xmlns:a16="http://schemas.microsoft.com/office/drawing/2014/main" id="{5A452466-1F5F-7810-500F-F787CFF7FAC5}"/>
+              <a16:creationId xmlns:a16="http://schemas.microsoft.com/office/drawing/2014/main" id="{B5A1B226-C314-3CD6-9455-19768773A067}"/>
             </a:ext>
           </a:extLst>
         </p:cNvPr>
@@ -6518,10 +7144,10 @@
       </p:grpSpPr>
       <p:pic>
         <p:nvPicPr>
-          <p:cNvPr id="41" name="그림 40">
-            <a:extLst>
-              <a:ext uri="{FF2B5EF4-FFF2-40B4-BE49-F238E27FC236}">
-                <a16:creationId xmlns:a16="http://schemas.microsoft.com/office/drawing/2014/main" id="{A4A60C99-450C-1E15-46B8-28D2C8BB8B85}"/>
+          <p:cNvPr id="33" name="그림 32">
+            <a:extLst>
+              <a:ext uri="{FF2B5EF4-FFF2-40B4-BE49-F238E27FC236}">
+                <a16:creationId xmlns:a16="http://schemas.microsoft.com/office/drawing/2014/main" id="{0CA7AF1B-6E0D-6E51-C575-5CC005067983}"/>
               </a:ext>
             </a:extLst>
           </p:cNvPr>
@@ -6531,102 +7157,33 @@
           <p:nvPr/>
         </p:nvPicPr>
         <p:blipFill>
-          <a:blip r:embed="rId2"/>
+          <a:blip r:embed="rId2" cstate="hqprint">
+            <a:extLst>
+              <a:ext uri="{28A0092B-C50C-407E-A947-70E740481C1C}">
+                <a14:useLocalDpi xmlns:a14="http://schemas.microsoft.com/office/drawing/2010/main" val="0"/>
+              </a:ext>
+            </a:extLst>
+          </a:blip>
           <a:stretch>
             <a:fillRect/>
           </a:stretch>
         </p:blipFill>
         <p:spPr>
           <a:xfrm>
-            <a:off x="584538" y="508616"/>
-            <a:ext cx="1009791" cy="390580"/>
+            <a:off x="201691" y="2642346"/>
+            <a:ext cx="2884409" cy="1882120"/>
           </a:xfrm>
           <a:prstGeom prst="rect">
             <a:avLst/>
           </a:prstGeom>
         </p:spPr>
       </p:pic>
-      <p:sp>
-        <p:nvSpPr>
-          <p:cNvPr id="42" name="TextBox 41">
-            <a:extLst>
-              <a:ext uri="{FF2B5EF4-FFF2-40B4-BE49-F238E27FC236}">
-                <a16:creationId xmlns:a16="http://schemas.microsoft.com/office/drawing/2014/main" id="{91542BDD-814B-6A18-44CA-89C5E0FF3BA5}"/>
-              </a:ext>
-            </a:extLst>
-          </p:cNvPr>
-          <p:cNvSpPr txBox="1"/>
-          <p:nvPr/>
-        </p:nvSpPr>
-        <p:spPr>
-          <a:xfrm>
-            <a:off x="524181" y="139284"/>
-            <a:ext cx="954107" cy="400110"/>
-          </a:xfrm>
-          <a:prstGeom prst="rect">
-            <a:avLst/>
-          </a:prstGeom>
-          <a:noFill/>
-        </p:spPr>
-        <p:txBody>
-          <a:bodyPr wrap="none" rtlCol="0">
-            <a:spAutoFit/>
-          </a:bodyPr>
-          <a:lstStyle/>
-          <a:p>
-            <a:r>
-              <a:rPr lang="ko-KR" altLang="en-US" sz="2000" dirty="0"/>
-              <a:t>업무명</a:t>
-            </a:r>
-          </a:p>
-        </p:txBody>
-      </p:sp>
-      <p:sp>
-        <p:nvSpPr>
-          <p:cNvPr id="43" name="TextBox 42">
-            <a:extLst>
-              <a:ext uri="{FF2B5EF4-FFF2-40B4-BE49-F238E27FC236}">
-                <a16:creationId xmlns:a16="http://schemas.microsoft.com/office/drawing/2014/main" id="{B5F4A0AA-0F79-46DD-043F-3239F1F8AB77}"/>
-              </a:ext>
-            </a:extLst>
-          </p:cNvPr>
-          <p:cNvSpPr txBox="1"/>
-          <p:nvPr/>
-        </p:nvSpPr>
-        <p:spPr>
-          <a:xfrm>
-            <a:off x="584538" y="926199"/>
-            <a:ext cx="1407758" cy="400110"/>
-          </a:xfrm>
-          <a:prstGeom prst="rect">
-            <a:avLst/>
-          </a:prstGeom>
-          <a:noFill/>
-        </p:spPr>
-        <p:txBody>
-          <a:bodyPr wrap="none" rtlCol="0">
-            <a:spAutoFit/>
-          </a:bodyPr>
-          <a:lstStyle/>
-          <a:p>
-            <a:r>
-              <a:rPr lang="en-US" altLang="ko-KR" sz="2000" dirty="0"/>
-              <a:t>1.</a:t>
-            </a:r>
-            <a:r>
-              <a:rPr lang="ko-KR" altLang="en-US" sz="2000" dirty="0" err="1"/>
-              <a:t>산탄데르</a:t>
-            </a:r>
-            <a:endParaRPr lang="en-US" altLang="ko-KR" sz="2000" dirty="0"/>
-          </a:p>
-        </p:txBody>
-      </p:sp>
       <p:pic>
         <p:nvPicPr>
-          <p:cNvPr id="45" name="그림 44">
-            <a:extLst>
-              <a:ext uri="{FF2B5EF4-FFF2-40B4-BE49-F238E27FC236}">
-                <a16:creationId xmlns:a16="http://schemas.microsoft.com/office/drawing/2014/main" id="{416DAC52-2FA2-D0E0-6EC2-E2CFED6E7617}"/>
+          <p:cNvPr id="39" name="그림 38">
+            <a:extLst>
+              <a:ext uri="{FF2B5EF4-FFF2-40B4-BE49-F238E27FC236}">
+                <a16:creationId xmlns:a16="http://schemas.microsoft.com/office/drawing/2014/main" id="{E4821260-5B77-4153-C580-29CAE4A155DB}"/>
               </a:ext>
             </a:extLst>
           </p:cNvPr>
@@ -6636,27 +7193,105 @@
           <p:nvPr/>
         </p:nvPicPr>
         <p:blipFill>
-          <a:blip r:embed="rId2"/>
+          <a:blip r:embed="rId3" cstate="hqprint">
+            <a:extLst>
+              <a:ext uri="{28A0092B-C50C-407E-A947-70E740481C1C}">
+                <a14:useLocalDpi xmlns:a14="http://schemas.microsoft.com/office/drawing/2010/main" val="0"/>
+              </a:ext>
+            </a:extLst>
+          </a:blip>
           <a:stretch>
             <a:fillRect/>
           </a:stretch>
         </p:blipFill>
         <p:spPr>
           <a:xfrm>
-            <a:off x="3540326" y="497200"/>
-            <a:ext cx="1009791" cy="390580"/>
+            <a:off x="4087945" y="2722936"/>
+            <a:ext cx="2884410" cy="1611922"/>
           </a:xfrm>
           <a:prstGeom prst="rect">
             <a:avLst/>
           </a:prstGeom>
         </p:spPr>
       </p:pic>
-      <p:sp>
-        <p:nvSpPr>
-          <p:cNvPr id="47" name="TextBox 46">
-            <a:extLst>
-              <a:ext uri="{FF2B5EF4-FFF2-40B4-BE49-F238E27FC236}">
-                <a16:creationId xmlns:a16="http://schemas.microsoft.com/office/drawing/2014/main" id="{12B54C19-809E-9639-A23C-64A998CC0628}"/>
+      <p:pic>
+        <p:nvPicPr>
+          <p:cNvPr id="53" name="그림 52">
+            <a:extLst>
+              <a:ext uri="{FF2B5EF4-FFF2-40B4-BE49-F238E27FC236}">
+                <a16:creationId xmlns:a16="http://schemas.microsoft.com/office/drawing/2014/main" id="{F5B93140-26CC-E46C-069D-B2A4296C0C9A}"/>
+              </a:ext>
+            </a:extLst>
+          </p:cNvPr>
+          <p:cNvPicPr>
+            <a:picLocks noChangeAspect="1"/>
+          </p:cNvPicPr>
+          <p:nvPr/>
+        </p:nvPicPr>
+        <p:blipFill>
+          <a:blip r:embed="rId4" cstate="hqprint">
+            <a:extLst>
+              <a:ext uri="{28A0092B-C50C-407E-A947-70E740481C1C}">
+                <a14:useLocalDpi xmlns:a14="http://schemas.microsoft.com/office/drawing/2010/main" val="0"/>
+              </a:ext>
+            </a:extLst>
+          </a:blip>
+          <a:stretch>
+            <a:fillRect/>
+          </a:stretch>
+        </p:blipFill>
+        <p:spPr>
+          <a:xfrm>
+            <a:off x="201691" y="4524466"/>
+            <a:ext cx="2884409" cy="2041556"/>
+          </a:xfrm>
+          <a:prstGeom prst="rect">
+            <a:avLst/>
+          </a:prstGeom>
+        </p:spPr>
+      </p:pic>
+      <p:pic>
+        <p:nvPicPr>
+          <p:cNvPr id="55" name="그림 54">
+            <a:extLst>
+              <a:ext uri="{FF2B5EF4-FFF2-40B4-BE49-F238E27FC236}">
+                <a16:creationId xmlns:a16="http://schemas.microsoft.com/office/drawing/2014/main" id="{D894951B-7CBB-41EF-CBF7-DCB3B6D8D234}"/>
+              </a:ext>
+            </a:extLst>
+          </p:cNvPr>
+          <p:cNvPicPr>
+            <a:picLocks noChangeAspect="1"/>
+          </p:cNvPicPr>
+          <p:nvPr/>
+        </p:nvPicPr>
+        <p:blipFill>
+          <a:blip r:embed="rId5" cstate="hqprint">
+            <a:extLst>
+              <a:ext uri="{28A0092B-C50C-407E-A947-70E740481C1C}">
+                <a14:useLocalDpi xmlns:a14="http://schemas.microsoft.com/office/drawing/2010/main" val="0"/>
+              </a:ext>
+            </a:extLst>
+          </a:blip>
+          <a:stretch>
+            <a:fillRect/>
+          </a:stretch>
+        </p:blipFill>
+        <p:spPr>
+          <a:xfrm>
+            <a:off x="4357132" y="4437229"/>
+            <a:ext cx="2615221" cy="2041557"/>
+          </a:xfrm>
+          <a:prstGeom prst="rect">
+            <a:avLst/>
+          </a:prstGeom>
+        </p:spPr>
+      </p:pic>
+      <p:sp>
+        <p:nvSpPr>
+          <p:cNvPr id="57" name="TextBox 56">
+            <a:extLst>
+              <a:ext uri="{FF2B5EF4-FFF2-40B4-BE49-F238E27FC236}">
+                <a16:creationId xmlns:a16="http://schemas.microsoft.com/office/drawing/2014/main" id="{85298108-A6C6-5D43-A38E-8B7FE49EA6C8}"/>
               </a:ext>
             </a:extLst>
           </p:cNvPr>
@@ -6665,8 +7300,8 @@
         </p:nvSpPr>
         <p:spPr>
           <a:xfrm>
-            <a:off x="3479969" y="127868"/>
-            <a:ext cx="954107" cy="400110"/>
+            <a:off x="8701446" y="1482862"/>
+            <a:ext cx="1813317" cy="400110"/>
           </a:xfrm>
           <a:prstGeom prst="rect">
             <a:avLst/>
@@ -6681,17 +7316,17 @@
           <a:p>
             <a:r>
               <a:rPr lang="ko-KR" altLang="en-US" sz="2000" dirty="0"/>
-              <a:t>모델명</a:t>
-            </a:r>
-          </a:p>
-        </p:txBody>
-      </p:sp>
-      <p:sp>
-        <p:nvSpPr>
-          <p:cNvPr id="49" name="TextBox 48">
-            <a:extLst>
-              <a:ext uri="{FF2B5EF4-FFF2-40B4-BE49-F238E27FC236}">
-                <a16:creationId xmlns:a16="http://schemas.microsoft.com/office/drawing/2014/main" id="{423AEF0E-29FE-9124-DCE3-5D7072039A93}"/>
+              <a:t>모델 수행결과</a:t>
+            </a:r>
+          </a:p>
+        </p:txBody>
+      </p:sp>
+      <p:sp>
+        <p:nvSpPr>
+          <p:cNvPr id="64" name="TextBox 63">
+            <a:extLst>
+              <a:ext uri="{FF2B5EF4-FFF2-40B4-BE49-F238E27FC236}">
+                <a16:creationId xmlns:a16="http://schemas.microsoft.com/office/drawing/2014/main" id="{91757298-2DC2-4EC0-063C-6B155978B008}"/>
               </a:ext>
             </a:extLst>
           </p:cNvPr>
@@ -6700,8 +7335,8 @@
         </p:nvSpPr>
         <p:spPr>
           <a:xfrm>
-            <a:off x="3540326" y="914783"/>
-            <a:ext cx="1462260" cy="400110"/>
+            <a:off x="9455696" y="2151347"/>
+            <a:ext cx="565348" cy="369332"/>
           </a:xfrm>
           <a:prstGeom prst="rect">
             <a:avLst/>
@@ -6715,19 +7350,85 @@
           <a:lstStyle/>
           <a:p>
             <a:r>
-              <a:rPr lang="en-US" altLang="ko-KR" sz="2000" dirty="0" smtClean="0"/>
-              <a:t>1.lightBGM</a:t>
-            </a:r>
-            <a:endParaRPr lang="en-US" altLang="ko-KR" sz="2000" dirty="0"/>
-          </a:p>
-        </p:txBody>
-      </p:sp>
-      <p:sp>
-        <p:nvSpPr>
-          <p:cNvPr id="51" name="TextBox 50">
-            <a:extLst>
-              <a:ext uri="{FF2B5EF4-FFF2-40B4-BE49-F238E27FC236}">
-                <a16:creationId xmlns:a16="http://schemas.microsoft.com/office/drawing/2014/main" id="{547DDCC3-D96C-F96B-A7D0-6BE605513722}"/>
+              <a:rPr lang="en-US" altLang="ko-KR" dirty="0"/>
+              <a:t>Roc</a:t>
+            </a:r>
+            <a:endParaRPr lang="ko-KR" altLang="en-US" dirty="0"/>
+          </a:p>
+        </p:txBody>
+      </p:sp>
+      <p:pic>
+        <p:nvPicPr>
+          <p:cNvPr id="4" name="그림 3">
+            <a:extLst>
+              <a:ext uri="{FF2B5EF4-FFF2-40B4-BE49-F238E27FC236}">
+                <a16:creationId xmlns:a16="http://schemas.microsoft.com/office/drawing/2014/main" id="{E5F90F59-0FDF-C94E-8704-2404EE4AC01A}"/>
+              </a:ext>
+            </a:extLst>
+          </p:cNvPr>
+          <p:cNvPicPr>
+            <a:picLocks noChangeAspect="1"/>
+          </p:cNvPicPr>
+          <p:nvPr/>
+        </p:nvPicPr>
+        <p:blipFill>
+          <a:blip r:embed="rId6" cstate="hqprint">
+            <a:extLst>
+              <a:ext uri="{28A0092B-C50C-407E-A947-70E740481C1C}">
+                <a14:useLocalDpi xmlns:a14="http://schemas.microsoft.com/office/drawing/2010/main" val="0"/>
+              </a:ext>
+            </a:extLst>
+          </a:blip>
+          <a:stretch>
+            <a:fillRect/>
+          </a:stretch>
+        </p:blipFill>
+        <p:spPr>
+          <a:xfrm>
+            <a:off x="7726495" y="2916452"/>
+            <a:ext cx="3763220" cy="3216028"/>
+          </a:xfrm>
+          <a:prstGeom prst="rect">
+            <a:avLst/>
+          </a:prstGeom>
+        </p:spPr>
+      </p:pic>
+      <p:pic>
+        <p:nvPicPr>
+          <p:cNvPr id="18" name="그림 17">
+            <a:extLst>
+              <a:ext uri="{FF2B5EF4-FFF2-40B4-BE49-F238E27FC236}">
+                <a16:creationId xmlns:a16="http://schemas.microsoft.com/office/drawing/2014/main" id="{A4A60C99-450C-1E15-46B8-28D2C8BB8B85}"/>
+              </a:ext>
+            </a:extLst>
+          </p:cNvPr>
+          <p:cNvPicPr>
+            <a:picLocks noChangeAspect="1"/>
+          </p:cNvPicPr>
+          <p:nvPr/>
+        </p:nvPicPr>
+        <p:blipFill>
+          <a:blip r:embed="rId7"/>
+          <a:stretch>
+            <a:fillRect/>
+          </a:stretch>
+        </p:blipFill>
+        <p:spPr>
+          <a:xfrm>
+            <a:off x="584538" y="508616"/>
+            <a:ext cx="1009791" cy="390580"/>
+          </a:xfrm>
+          <a:prstGeom prst="rect">
+            <a:avLst/>
+          </a:prstGeom>
+        </p:spPr>
+      </p:pic>
+      <p:sp>
+        <p:nvSpPr>
+          <p:cNvPr id="19" name="TextBox 18">
+            <a:extLst>
+              <a:ext uri="{FF2B5EF4-FFF2-40B4-BE49-F238E27FC236}">
+                <a16:creationId xmlns:a16="http://schemas.microsoft.com/office/drawing/2014/main" id="{91542BDD-814B-6A18-44CA-89C5E0FF3BA5}"/>
               </a:ext>
             </a:extLst>
           </p:cNvPr>
@@ -6736,8 +7437,8 @@
         </p:nvSpPr>
         <p:spPr>
           <a:xfrm>
-            <a:off x="5953392" y="487670"/>
-            <a:ext cx="1467068" cy="400110"/>
+            <a:off x="524181" y="139284"/>
+            <a:ext cx="954107" cy="400110"/>
           </a:xfrm>
           <a:prstGeom prst="rect">
             <a:avLst/>
@@ -6752,17 +7453,17 @@
           <a:p>
             <a:r>
               <a:rPr lang="ko-KR" altLang="en-US" sz="2000" dirty="0"/>
-              <a:t>전처리조회</a:t>
-            </a:r>
-          </a:p>
-        </p:txBody>
-      </p:sp>
-      <p:sp>
-        <p:nvSpPr>
-          <p:cNvPr id="58" name="TextBox 57">
-            <a:extLst>
-              <a:ext uri="{FF2B5EF4-FFF2-40B4-BE49-F238E27FC236}">
-                <a16:creationId xmlns:a16="http://schemas.microsoft.com/office/drawing/2014/main" id="{F614D1BD-D56C-FF5D-B4F0-FF3CD227E8B3}"/>
+              <a:t>업무명</a:t>
+            </a:r>
+          </a:p>
+        </p:txBody>
+      </p:sp>
+      <p:sp>
+        <p:nvSpPr>
+          <p:cNvPr id="20" name="TextBox 19">
+            <a:extLst>
+              <a:ext uri="{FF2B5EF4-FFF2-40B4-BE49-F238E27FC236}">
+                <a16:creationId xmlns:a16="http://schemas.microsoft.com/office/drawing/2014/main" id="{B5F4A0AA-0F79-46DD-043F-3239F1F8AB77}"/>
               </a:ext>
             </a:extLst>
           </p:cNvPr>
@@ -6771,8 +7472,8 @@
         </p:nvSpPr>
         <p:spPr>
           <a:xfrm>
-            <a:off x="4271456" y="1725936"/>
-            <a:ext cx="2929007" cy="400110"/>
+            <a:off x="584538" y="926199"/>
+            <a:ext cx="1407758" cy="400110"/>
           </a:xfrm>
           <a:prstGeom prst="rect">
             <a:avLst/>
@@ -6786,6 +7487,182 @@
           <a:lstStyle/>
           <a:p>
             <a:r>
+              <a:rPr lang="en-US" altLang="ko-KR" sz="2000" dirty="0"/>
+              <a:t>1.</a:t>
+            </a:r>
+            <a:r>
+              <a:rPr lang="ko-KR" altLang="en-US" sz="2000" dirty="0" err="1"/>
+              <a:t>산탄데르</a:t>
+            </a:r>
+            <a:endParaRPr lang="en-US" altLang="ko-KR" sz="2000" dirty="0"/>
+          </a:p>
+        </p:txBody>
+      </p:sp>
+      <p:pic>
+        <p:nvPicPr>
+          <p:cNvPr id="21" name="그림 20">
+            <a:extLst>
+              <a:ext uri="{FF2B5EF4-FFF2-40B4-BE49-F238E27FC236}">
+                <a16:creationId xmlns:a16="http://schemas.microsoft.com/office/drawing/2014/main" id="{416DAC52-2FA2-D0E0-6EC2-E2CFED6E7617}"/>
+              </a:ext>
+            </a:extLst>
+          </p:cNvPr>
+          <p:cNvPicPr>
+            <a:picLocks noChangeAspect="1"/>
+          </p:cNvPicPr>
+          <p:nvPr/>
+        </p:nvPicPr>
+        <p:blipFill>
+          <a:blip r:embed="rId7"/>
+          <a:stretch>
+            <a:fillRect/>
+          </a:stretch>
+        </p:blipFill>
+        <p:spPr>
+          <a:xfrm>
+            <a:off x="3540326" y="497200"/>
+            <a:ext cx="1009791" cy="390580"/>
+          </a:xfrm>
+          <a:prstGeom prst="rect">
+            <a:avLst/>
+          </a:prstGeom>
+        </p:spPr>
+      </p:pic>
+      <p:sp>
+        <p:nvSpPr>
+          <p:cNvPr id="22" name="TextBox 21">
+            <a:extLst>
+              <a:ext uri="{FF2B5EF4-FFF2-40B4-BE49-F238E27FC236}">
+                <a16:creationId xmlns:a16="http://schemas.microsoft.com/office/drawing/2014/main" id="{12B54C19-809E-9639-A23C-64A998CC0628}"/>
+              </a:ext>
+            </a:extLst>
+          </p:cNvPr>
+          <p:cNvSpPr txBox="1"/>
+          <p:nvPr/>
+        </p:nvSpPr>
+        <p:spPr>
+          <a:xfrm>
+            <a:off x="3479969" y="127868"/>
+            <a:ext cx="954107" cy="400110"/>
+          </a:xfrm>
+          <a:prstGeom prst="rect">
+            <a:avLst/>
+          </a:prstGeom>
+          <a:noFill/>
+        </p:spPr>
+        <p:txBody>
+          <a:bodyPr wrap="none" rtlCol="0">
+            <a:spAutoFit/>
+          </a:bodyPr>
+          <a:lstStyle/>
+          <a:p>
+            <a:r>
+              <a:rPr lang="ko-KR" altLang="en-US" sz="2000" dirty="0"/>
+              <a:t>모델명</a:t>
+            </a:r>
+          </a:p>
+        </p:txBody>
+      </p:sp>
+      <p:sp>
+        <p:nvSpPr>
+          <p:cNvPr id="23" name="TextBox 22">
+            <a:extLst>
+              <a:ext uri="{FF2B5EF4-FFF2-40B4-BE49-F238E27FC236}">
+                <a16:creationId xmlns:a16="http://schemas.microsoft.com/office/drawing/2014/main" id="{423AEF0E-29FE-9124-DCE3-5D7072039A93}"/>
+              </a:ext>
+            </a:extLst>
+          </p:cNvPr>
+          <p:cNvSpPr txBox="1"/>
+          <p:nvPr/>
+        </p:nvSpPr>
+        <p:spPr>
+          <a:xfrm>
+            <a:off x="3540326" y="914783"/>
+            <a:ext cx="1462260" cy="400110"/>
+          </a:xfrm>
+          <a:prstGeom prst="rect">
+            <a:avLst/>
+          </a:prstGeom>
+          <a:noFill/>
+        </p:spPr>
+        <p:txBody>
+          <a:bodyPr wrap="none" rtlCol="0">
+            <a:spAutoFit/>
+          </a:bodyPr>
+          <a:lstStyle/>
+          <a:p>
+            <a:r>
+              <a:rPr lang="en-US" altLang="ko-KR" sz="2000" dirty="0" smtClean="0"/>
+              <a:t>1.lightBGM</a:t>
+            </a:r>
+            <a:endParaRPr lang="en-US" altLang="ko-KR" sz="2000" dirty="0"/>
+          </a:p>
+        </p:txBody>
+      </p:sp>
+      <p:sp>
+        <p:nvSpPr>
+          <p:cNvPr id="24" name="TextBox 23">
+            <a:extLst>
+              <a:ext uri="{FF2B5EF4-FFF2-40B4-BE49-F238E27FC236}">
+                <a16:creationId xmlns:a16="http://schemas.microsoft.com/office/drawing/2014/main" id="{547DDCC3-D96C-F96B-A7D0-6BE605513722}"/>
+              </a:ext>
+            </a:extLst>
+          </p:cNvPr>
+          <p:cNvSpPr txBox="1"/>
+          <p:nvPr/>
+        </p:nvSpPr>
+        <p:spPr>
+          <a:xfrm>
+            <a:off x="5953392" y="487670"/>
+            <a:ext cx="1467068" cy="400110"/>
+          </a:xfrm>
+          <a:prstGeom prst="rect">
+            <a:avLst/>
+          </a:prstGeom>
+          <a:noFill/>
+        </p:spPr>
+        <p:txBody>
+          <a:bodyPr wrap="none" rtlCol="0">
+            <a:spAutoFit/>
+          </a:bodyPr>
+          <a:lstStyle/>
+          <a:p>
+            <a:r>
+              <a:rPr lang="ko-KR" altLang="en-US" sz="2000" dirty="0"/>
+              <a:t>전처리조회</a:t>
+            </a:r>
+          </a:p>
+        </p:txBody>
+      </p:sp>
+      <p:sp>
+        <p:nvSpPr>
+          <p:cNvPr id="25" name="TextBox 24">
+            <a:extLst>
+              <a:ext uri="{FF2B5EF4-FFF2-40B4-BE49-F238E27FC236}">
+                <a16:creationId xmlns:a16="http://schemas.microsoft.com/office/drawing/2014/main" id="{F614D1BD-D56C-FF5D-B4F0-FF3CD227E8B3}"/>
+              </a:ext>
+            </a:extLst>
+          </p:cNvPr>
+          <p:cNvSpPr txBox="1"/>
+          <p:nvPr/>
+        </p:nvSpPr>
+        <p:spPr>
+          <a:xfrm>
+            <a:off x="4271456" y="1448087"/>
+            <a:ext cx="2929007" cy="400110"/>
+          </a:xfrm>
+          <a:prstGeom prst="rect">
+            <a:avLst/>
+          </a:prstGeom>
+          <a:noFill/>
+        </p:spPr>
+        <p:txBody>
+          <a:bodyPr wrap="none" rtlCol="0">
+            <a:spAutoFit/>
+          </a:bodyPr>
+          <a:lstStyle/>
+          <a:p>
+            <a:r>
               <a:rPr lang="ko-KR" altLang="en-US" sz="2000" dirty="0" err="1"/>
               <a:t>전처리</a:t>
             </a:r>
@@ -6799,13 +7676,20 @@
     </p:spTree>
     <p:extLst>
       <p:ext uri="{BB962C8B-B14F-4D97-AF65-F5344CB8AC3E}">
-        <p14:creationId xmlns:p14="http://schemas.microsoft.com/office/powerpoint/2010/main" val="2399930291"/>
+        <p14:creationId xmlns:p14="http://schemas.microsoft.com/office/powerpoint/2010/main" val="1037591902"/>
       </p:ext>
     </p:extLst>
   </p:cSld>
   <p:clrMapOvr>
     <a:masterClrMapping/>
   </p:clrMapOvr>
+  <p:timing>
+    <p:tnLst>
+      <p:par>
+        <p:cTn id="1" dur="indefinite" restart="never" nodeType="tmRoot"/>
+      </p:par>
+    </p:tnLst>
+  </p:timing>
 </p:sld>
 </file>
 
@@ -6834,10 +7718,10 @@
       </p:grpSpPr>
       <p:pic>
         <p:nvPicPr>
-          <p:cNvPr id="33" name="그림 32">
-            <a:extLst>
-              <a:ext uri="{FF2B5EF4-FFF2-40B4-BE49-F238E27FC236}">
-                <a16:creationId xmlns:a16="http://schemas.microsoft.com/office/drawing/2014/main" id="{60ED49AB-E10D-2F91-8764-DDDA0F0F789F}"/>
+          <p:cNvPr id="41" name="그림 40">
+            <a:extLst>
+              <a:ext uri="{FF2B5EF4-FFF2-40B4-BE49-F238E27FC236}">
+                <a16:creationId xmlns:a16="http://schemas.microsoft.com/office/drawing/2014/main" id="{A4A60C99-450C-1E15-46B8-28D2C8BB8B85}"/>
               </a:ext>
             </a:extLst>
           </p:cNvPr>
@@ -6847,33 +7731,102 @@
           <p:nvPr/>
         </p:nvPicPr>
         <p:blipFill>
-          <a:blip r:embed="rId2" cstate="hqprint">
-            <a:extLst>
-              <a:ext uri="{28A0092B-C50C-407E-A947-70E740481C1C}">
-                <a14:useLocalDpi xmlns:a14="http://schemas.microsoft.com/office/drawing/2010/main" val="0"/>
-              </a:ext>
-            </a:extLst>
-          </a:blip>
+          <a:blip r:embed="rId2"/>
           <a:stretch>
             <a:fillRect/>
           </a:stretch>
         </p:blipFill>
         <p:spPr>
           <a:xfrm>
-            <a:off x="-46728" y="88135"/>
-            <a:ext cx="5962786" cy="6555036"/>
+            <a:off x="584538" y="508616"/>
+            <a:ext cx="1009791" cy="390580"/>
           </a:xfrm>
           <a:prstGeom prst="rect">
             <a:avLst/>
           </a:prstGeom>
         </p:spPr>
       </p:pic>
+      <p:sp>
+        <p:nvSpPr>
+          <p:cNvPr id="42" name="TextBox 41">
+            <a:extLst>
+              <a:ext uri="{FF2B5EF4-FFF2-40B4-BE49-F238E27FC236}">
+                <a16:creationId xmlns:a16="http://schemas.microsoft.com/office/drawing/2014/main" id="{91542BDD-814B-6A18-44CA-89C5E0FF3BA5}"/>
+              </a:ext>
+            </a:extLst>
+          </p:cNvPr>
+          <p:cNvSpPr txBox="1"/>
+          <p:nvPr/>
+        </p:nvSpPr>
+        <p:spPr>
+          <a:xfrm>
+            <a:off x="524181" y="139284"/>
+            <a:ext cx="954107" cy="400110"/>
+          </a:xfrm>
+          <a:prstGeom prst="rect">
+            <a:avLst/>
+          </a:prstGeom>
+          <a:noFill/>
+        </p:spPr>
+        <p:txBody>
+          <a:bodyPr wrap="none" rtlCol="0">
+            <a:spAutoFit/>
+          </a:bodyPr>
+          <a:lstStyle/>
+          <a:p>
+            <a:r>
+              <a:rPr lang="ko-KR" altLang="en-US" sz="2000" dirty="0"/>
+              <a:t>업무명</a:t>
+            </a:r>
+          </a:p>
+        </p:txBody>
+      </p:sp>
+      <p:sp>
+        <p:nvSpPr>
+          <p:cNvPr id="43" name="TextBox 42">
+            <a:extLst>
+              <a:ext uri="{FF2B5EF4-FFF2-40B4-BE49-F238E27FC236}">
+                <a16:creationId xmlns:a16="http://schemas.microsoft.com/office/drawing/2014/main" id="{B5F4A0AA-0F79-46DD-043F-3239F1F8AB77}"/>
+              </a:ext>
+            </a:extLst>
+          </p:cNvPr>
+          <p:cNvSpPr txBox="1"/>
+          <p:nvPr/>
+        </p:nvSpPr>
+        <p:spPr>
+          <a:xfrm>
+            <a:off x="584538" y="926199"/>
+            <a:ext cx="1407758" cy="400110"/>
+          </a:xfrm>
+          <a:prstGeom prst="rect">
+            <a:avLst/>
+          </a:prstGeom>
+          <a:noFill/>
+        </p:spPr>
+        <p:txBody>
+          <a:bodyPr wrap="none" rtlCol="0">
+            <a:spAutoFit/>
+          </a:bodyPr>
+          <a:lstStyle/>
+          <a:p>
+            <a:r>
+              <a:rPr lang="en-US" altLang="ko-KR" sz="2000" dirty="0"/>
+              <a:t>1.</a:t>
+            </a:r>
+            <a:r>
+              <a:rPr lang="ko-KR" altLang="en-US" sz="2000" dirty="0" err="1"/>
+              <a:t>산탄데르</a:t>
+            </a:r>
+            <a:endParaRPr lang="en-US" altLang="ko-KR" sz="2000" dirty="0"/>
+          </a:p>
+        </p:txBody>
+      </p:sp>
       <p:pic>
         <p:nvPicPr>
-          <p:cNvPr id="39" name="그림 38">
-            <a:extLst>
-              <a:ext uri="{FF2B5EF4-FFF2-40B4-BE49-F238E27FC236}">
-                <a16:creationId xmlns:a16="http://schemas.microsoft.com/office/drawing/2014/main" id="{0E0B1D4C-9217-16E3-7A40-A4D6D3D8EDE7}"/>
+          <p:cNvPr id="45" name="그림 44">
+            <a:extLst>
+              <a:ext uri="{FF2B5EF4-FFF2-40B4-BE49-F238E27FC236}">
+                <a16:creationId xmlns:a16="http://schemas.microsoft.com/office/drawing/2014/main" id="{416DAC52-2FA2-D0E0-6EC2-E2CFED6E7617}"/>
               </a:ext>
             </a:extLst>
           </p:cNvPr>
@@ -6883,37 +7836,183 @@
           <p:nvPr/>
         </p:nvPicPr>
         <p:blipFill>
-          <a:blip r:embed="rId3" cstate="hqprint">
-            <a:extLst>
-              <a:ext uri="{28A0092B-C50C-407E-A947-70E740481C1C}">
-                <a14:useLocalDpi xmlns:a14="http://schemas.microsoft.com/office/drawing/2010/main" val="0"/>
-              </a:ext>
-            </a:extLst>
-          </a:blip>
+          <a:blip r:embed="rId2"/>
           <a:stretch>
             <a:fillRect/>
           </a:stretch>
         </p:blipFill>
         <p:spPr>
           <a:xfrm>
-            <a:off x="6191480" y="0"/>
-            <a:ext cx="5905040" cy="6643172"/>
+            <a:off x="3540326" y="497200"/>
+            <a:ext cx="1009791" cy="390580"/>
           </a:xfrm>
           <a:prstGeom prst="rect">
             <a:avLst/>
           </a:prstGeom>
         </p:spPr>
       </p:pic>
+      <p:sp>
+        <p:nvSpPr>
+          <p:cNvPr id="47" name="TextBox 46">
+            <a:extLst>
+              <a:ext uri="{FF2B5EF4-FFF2-40B4-BE49-F238E27FC236}">
+                <a16:creationId xmlns:a16="http://schemas.microsoft.com/office/drawing/2014/main" id="{12B54C19-809E-9639-A23C-64A998CC0628}"/>
+              </a:ext>
+            </a:extLst>
+          </p:cNvPr>
+          <p:cNvSpPr txBox="1"/>
+          <p:nvPr/>
+        </p:nvSpPr>
+        <p:spPr>
+          <a:xfrm>
+            <a:off x="3479969" y="127868"/>
+            <a:ext cx="954107" cy="400110"/>
+          </a:xfrm>
+          <a:prstGeom prst="rect">
+            <a:avLst/>
+          </a:prstGeom>
+          <a:noFill/>
+        </p:spPr>
+        <p:txBody>
+          <a:bodyPr wrap="none" rtlCol="0">
+            <a:spAutoFit/>
+          </a:bodyPr>
+          <a:lstStyle/>
+          <a:p>
+            <a:r>
+              <a:rPr lang="ko-KR" altLang="en-US" sz="2000" dirty="0"/>
+              <a:t>모델명</a:t>
+            </a:r>
+          </a:p>
+        </p:txBody>
+      </p:sp>
+      <p:sp>
+        <p:nvSpPr>
+          <p:cNvPr id="49" name="TextBox 48">
+            <a:extLst>
+              <a:ext uri="{FF2B5EF4-FFF2-40B4-BE49-F238E27FC236}">
+                <a16:creationId xmlns:a16="http://schemas.microsoft.com/office/drawing/2014/main" id="{423AEF0E-29FE-9124-DCE3-5D7072039A93}"/>
+              </a:ext>
+            </a:extLst>
+          </p:cNvPr>
+          <p:cNvSpPr txBox="1"/>
+          <p:nvPr/>
+        </p:nvSpPr>
+        <p:spPr>
+          <a:xfrm>
+            <a:off x="3540326" y="914783"/>
+            <a:ext cx="1462260" cy="400110"/>
+          </a:xfrm>
+          <a:prstGeom prst="rect">
+            <a:avLst/>
+          </a:prstGeom>
+          <a:noFill/>
+        </p:spPr>
+        <p:txBody>
+          <a:bodyPr wrap="none" rtlCol="0">
+            <a:spAutoFit/>
+          </a:bodyPr>
+          <a:lstStyle/>
+          <a:p>
+            <a:r>
+              <a:rPr lang="en-US" altLang="ko-KR" sz="2000" dirty="0" smtClean="0"/>
+              <a:t>1.lightBGM</a:t>
+            </a:r>
+            <a:endParaRPr lang="en-US" altLang="ko-KR" sz="2000" dirty="0"/>
+          </a:p>
+        </p:txBody>
+      </p:sp>
+      <p:sp>
+        <p:nvSpPr>
+          <p:cNvPr id="51" name="TextBox 50">
+            <a:extLst>
+              <a:ext uri="{FF2B5EF4-FFF2-40B4-BE49-F238E27FC236}">
+                <a16:creationId xmlns:a16="http://schemas.microsoft.com/office/drawing/2014/main" id="{547DDCC3-D96C-F96B-A7D0-6BE605513722}"/>
+              </a:ext>
+            </a:extLst>
+          </p:cNvPr>
+          <p:cNvSpPr txBox="1"/>
+          <p:nvPr/>
+        </p:nvSpPr>
+        <p:spPr>
+          <a:xfrm>
+            <a:off x="5953392" y="487670"/>
+            <a:ext cx="1467068" cy="400110"/>
+          </a:xfrm>
+          <a:prstGeom prst="rect">
+            <a:avLst/>
+          </a:prstGeom>
+          <a:noFill/>
+        </p:spPr>
+        <p:txBody>
+          <a:bodyPr wrap="none" rtlCol="0">
+            <a:spAutoFit/>
+          </a:bodyPr>
+          <a:lstStyle/>
+          <a:p>
+            <a:r>
+              <a:rPr lang="ko-KR" altLang="en-US" sz="2000" dirty="0"/>
+              <a:t>전처리조회</a:t>
+            </a:r>
+          </a:p>
+        </p:txBody>
+      </p:sp>
+      <p:sp>
+        <p:nvSpPr>
+          <p:cNvPr id="58" name="TextBox 57">
+            <a:extLst>
+              <a:ext uri="{FF2B5EF4-FFF2-40B4-BE49-F238E27FC236}">
+                <a16:creationId xmlns:a16="http://schemas.microsoft.com/office/drawing/2014/main" id="{F614D1BD-D56C-FF5D-B4F0-FF3CD227E8B3}"/>
+              </a:ext>
+            </a:extLst>
+          </p:cNvPr>
+          <p:cNvSpPr txBox="1"/>
+          <p:nvPr/>
+        </p:nvSpPr>
+        <p:spPr>
+          <a:xfrm>
+            <a:off x="4271456" y="1725936"/>
+            <a:ext cx="2929007" cy="400110"/>
+          </a:xfrm>
+          <a:prstGeom prst="rect">
+            <a:avLst/>
+          </a:prstGeom>
+          <a:noFill/>
+        </p:spPr>
+        <p:txBody>
+          <a:bodyPr wrap="none" rtlCol="0">
+            <a:spAutoFit/>
+          </a:bodyPr>
+          <a:lstStyle/>
+          <a:p>
+            <a:r>
+              <a:rPr lang="ko-KR" altLang="en-US" sz="2000" dirty="0" err="1"/>
+              <a:t>전처리</a:t>
+            </a:r>
+            <a:r>
+              <a:rPr lang="ko-KR" altLang="en-US" sz="2000" dirty="0"/>
+              <a:t> 데이터 검증결과</a:t>
+            </a:r>
+          </a:p>
+        </p:txBody>
+      </p:sp>
     </p:spTree>
     <p:extLst>
       <p:ext uri="{BB962C8B-B14F-4D97-AF65-F5344CB8AC3E}">
-        <p14:creationId xmlns:p14="http://schemas.microsoft.com/office/powerpoint/2010/main" val="574939487"/>
+        <p14:creationId xmlns:p14="http://schemas.microsoft.com/office/powerpoint/2010/main" val="2399930291"/>
       </p:ext>
     </p:extLst>
   </p:cSld>
   <p:clrMapOvr>
     <a:masterClrMapping/>
   </p:clrMapOvr>
+  <p:timing>
+    <p:tnLst>
+      <p:par>
+        <p:cTn id="1" dur="indefinite" restart="never" nodeType="tmRoot"/>
+      </p:par>
+    </p:tnLst>
+  </p:timing>
 </p:sld>
 </file>
 
@@ -6942,10 +8041,10 @@
       </p:grpSpPr>
       <p:pic>
         <p:nvPicPr>
-          <p:cNvPr id="53" name="그림 52">
-            <a:extLst>
-              <a:ext uri="{FF2B5EF4-FFF2-40B4-BE49-F238E27FC236}">
-                <a16:creationId xmlns:a16="http://schemas.microsoft.com/office/drawing/2014/main" id="{CCCA38D7-0008-2CD6-3CBF-45A6C80FFD7F}"/>
+          <p:cNvPr id="33" name="그림 32">
+            <a:extLst>
+              <a:ext uri="{FF2B5EF4-FFF2-40B4-BE49-F238E27FC236}">
+                <a16:creationId xmlns:a16="http://schemas.microsoft.com/office/drawing/2014/main" id="{60ED49AB-E10D-2F91-8764-DDDA0F0F789F}"/>
               </a:ext>
             </a:extLst>
           </p:cNvPr>
@@ -6968,8 +8067,8 @@
         </p:blipFill>
         <p:spPr>
           <a:xfrm>
-            <a:off x="165253" y="216870"/>
-            <a:ext cx="5894024" cy="6514436"/>
+            <a:off x="-46728" y="88135"/>
+            <a:ext cx="5962786" cy="6555036"/>
           </a:xfrm>
           <a:prstGeom prst="rect">
             <a:avLst/>
@@ -6978,10 +8077,10 @@
       </p:pic>
       <p:pic>
         <p:nvPicPr>
-          <p:cNvPr id="55" name="그림 54">
-            <a:extLst>
-              <a:ext uri="{FF2B5EF4-FFF2-40B4-BE49-F238E27FC236}">
-                <a16:creationId xmlns:a16="http://schemas.microsoft.com/office/drawing/2014/main" id="{D4571169-D003-2B75-45B5-F60DB83E4ADF}"/>
+          <p:cNvPr id="39" name="그림 38">
+            <a:extLst>
+              <a:ext uri="{FF2B5EF4-FFF2-40B4-BE49-F238E27FC236}">
+                <a16:creationId xmlns:a16="http://schemas.microsoft.com/office/drawing/2014/main" id="{0E0B1D4C-9217-16E3-7A40-A4D6D3D8EDE7}"/>
               </a:ext>
             </a:extLst>
           </p:cNvPr>
@@ -7004,8 +8103,8 @@
         </p:blipFill>
         <p:spPr>
           <a:xfrm>
-            <a:off x="6246564" y="316920"/>
-            <a:ext cx="5816906" cy="6326251"/>
+            <a:off x="6191480" y="0"/>
+            <a:ext cx="5905040" cy="6643172"/>
           </a:xfrm>
           <a:prstGeom prst="rect">
             <a:avLst/>
@@ -7015,13 +8114,20 @@
     </p:spTree>
     <p:extLst>
       <p:ext uri="{BB962C8B-B14F-4D97-AF65-F5344CB8AC3E}">
-        <p14:creationId xmlns:p14="http://schemas.microsoft.com/office/powerpoint/2010/main" val="3381318259"/>
+        <p14:creationId xmlns:p14="http://schemas.microsoft.com/office/powerpoint/2010/main" val="574939487"/>
       </p:ext>
     </p:extLst>
   </p:cSld>
   <p:clrMapOvr>
     <a:masterClrMapping/>
   </p:clrMapOvr>
+  <p:timing>
+    <p:tnLst>
+      <p:par>
+        <p:cTn id="1" dur="indefinite" restart="never" nodeType="tmRoot"/>
+      </p:par>
+    </p:tnLst>
+  </p:timing>
 </p:sld>
 </file>
 
@@ -7048,83 +8154,12 @@
           <a:chExt cx="0" cy="0"/>
         </a:xfrm>
       </p:grpSpPr>
-      <p:sp>
-        <p:nvSpPr>
-          <p:cNvPr id="57" name="TextBox 56">
-            <a:extLst>
-              <a:ext uri="{FF2B5EF4-FFF2-40B4-BE49-F238E27FC236}">
-                <a16:creationId xmlns:a16="http://schemas.microsoft.com/office/drawing/2014/main" id="{A7648BD4-B737-44BE-E221-5837F9C0EDBA}"/>
-              </a:ext>
-            </a:extLst>
-          </p:cNvPr>
-          <p:cNvSpPr txBox="1"/>
-          <p:nvPr/>
-        </p:nvSpPr>
-        <p:spPr>
-          <a:xfrm>
-            <a:off x="4676276" y="233000"/>
-            <a:ext cx="998991" cy="246221"/>
-          </a:xfrm>
-          <a:prstGeom prst="rect">
-            <a:avLst/>
-          </a:prstGeom>
-          <a:noFill/>
-        </p:spPr>
-        <p:txBody>
-          <a:bodyPr wrap="none" rtlCol="0">
-            <a:spAutoFit/>
-          </a:bodyPr>
-          <a:lstStyle/>
-          <a:p>
-            <a:r>
-              <a:rPr lang="ko-KR" altLang="en-US" sz="1000" dirty="0"/>
-              <a:t>모델 수행결과</a:t>
-            </a:r>
-          </a:p>
-        </p:txBody>
-      </p:sp>
-      <p:sp>
-        <p:nvSpPr>
-          <p:cNvPr id="64" name="TextBox 63">
-            <a:extLst>
-              <a:ext uri="{FF2B5EF4-FFF2-40B4-BE49-F238E27FC236}">
-                <a16:creationId xmlns:a16="http://schemas.microsoft.com/office/drawing/2014/main" id="{0117A6CA-EA65-56BD-D782-D439614D1096}"/>
-              </a:ext>
-            </a:extLst>
-          </p:cNvPr>
-          <p:cNvSpPr txBox="1"/>
-          <p:nvPr/>
-        </p:nvSpPr>
-        <p:spPr>
-          <a:xfrm>
-            <a:off x="4893097" y="620003"/>
-            <a:ext cx="565348" cy="369332"/>
-          </a:xfrm>
-          <a:prstGeom prst="rect">
-            <a:avLst/>
-          </a:prstGeom>
-          <a:noFill/>
-        </p:spPr>
-        <p:txBody>
-          <a:bodyPr wrap="none" rtlCol="0">
-            <a:spAutoFit/>
-          </a:bodyPr>
-          <a:lstStyle/>
-          <a:p>
-            <a:r>
-              <a:rPr lang="en-US" altLang="ko-KR" dirty="0"/>
-              <a:t>Roc</a:t>
-            </a:r>
-            <a:endParaRPr lang="ko-KR" altLang="en-US" dirty="0"/>
-          </a:p>
-        </p:txBody>
-      </p:sp>
       <p:pic>
         <p:nvPicPr>
-          <p:cNvPr id="3" name="그림 2">
-            <a:extLst>
-              <a:ext uri="{FF2B5EF4-FFF2-40B4-BE49-F238E27FC236}">
-                <a16:creationId xmlns:a16="http://schemas.microsoft.com/office/drawing/2014/main" id="{0F02FEA4-FD62-3258-7048-1F53A7D27B48}"/>
+          <p:cNvPr id="53" name="그림 52">
+            <a:extLst>
+              <a:ext uri="{FF2B5EF4-FFF2-40B4-BE49-F238E27FC236}">
+                <a16:creationId xmlns:a16="http://schemas.microsoft.com/office/drawing/2014/main" id="{CCCA38D7-0008-2CD6-3CBF-45A6C80FFD7F}"/>
               </a:ext>
             </a:extLst>
           </p:cNvPr>
@@ -7147,8 +8182,194 @@
         </p:blipFill>
         <p:spPr>
           <a:xfrm>
-            <a:off x="200996" y="1222872"/>
-            <a:ext cx="10419264" cy="5144877"/>
+            <a:off x="165253" y="216870"/>
+            <a:ext cx="5894024" cy="6514436"/>
+          </a:xfrm>
+          <a:prstGeom prst="rect">
+            <a:avLst/>
+          </a:prstGeom>
+        </p:spPr>
+      </p:pic>
+      <p:pic>
+        <p:nvPicPr>
+          <p:cNvPr id="55" name="그림 54">
+            <a:extLst>
+              <a:ext uri="{FF2B5EF4-FFF2-40B4-BE49-F238E27FC236}">
+                <a16:creationId xmlns:a16="http://schemas.microsoft.com/office/drawing/2014/main" id="{D4571169-D003-2B75-45B5-F60DB83E4ADF}"/>
+              </a:ext>
+            </a:extLst>
+          </p:cNvPr>
+          <p:cNvPicPr>
+            <a:picLocks noChangeAspect="1"/>
+          </p:cNvPicPr>
+          <p:nvPr/>
+        </p:nvPicPr>
+        <p:blipFill>
+          <a:blip r:embed="rId3" cstate="hqprint">
+            <a:extLst>
+              <a:ext uri="{28A0092B-C50C-407E-A947-70E740481C1C}">
+                <a14:useLocalDpi xmlns:a14="http://schemas.microsoft.com/office/drawing/2010/main" val="0"/>
+              </a:ext>
+            </a:extLst>
+          </a:blip>
+          <a:stretch>
+            <a:fillRect/>
+          </a:stretch>
+        </p:blipFill>
+        <p:spPr>
+          <a:xfrm>
+            <a:off x="6246564" y="316920"/>
+            <a:ext cx="5816906" cy="6326251"/>
+          </a:xfrm>
+          <a:prstGeom prst="rect">
+            <a:avLst/>
+          </a:prstGeom>
+        </p:spPr>
+      </p:pic>
+    </p:spTree>
+    <p:extLst>
+      <p:ext uri="{BB962C8B-B14F-4D97-AF65-F5344CB8AC3E}">
+        <p14:creationId xmlns:p14="http://schemas.microsoft.com/office/powerpoint/2010/main" val="3381318259"/>
+      </p:ext>
+    </p:extLst>
+  </p:cSld>
+  <p:clrMapOvr>
+    <a:masterClrMapping/>
+  </p:clrMapOvr>
+  <p:timing>
+    <p:tnLst>
+      <p:par>
+        <p:cTn id="1" dur="indefinite" restart="never" nodeType="tmRoot"/>
+      </p:par>
+    </p:tnLst>
+  </p:timing>
+</p:sld>
+</file>
+
+<file path=ppt/slides/slide7.xml><?xml version="1.0" encoding="utf-8"?>
+<p:sld xmlns:a="http://schemas.openxmlformats.org/drawingml/2006/main" xmlns:r="http://schemas.openxmlformats.org/officeDocument/2006/relationships" xmlns:p="http://schemas.openxmlformats.org/presentationml/2006/main">
+  <p:cSld>
+    <p:spTree>
+      <p:nvGrpSpPr>
+        <p:cNvPr id="1" name="">
+          <a:extLst>
+            <a:ext uri="{FF2B5EF4-FFF2-40B4-BE49-F238E27FC236}">
+              <a16:creationId xmlns:a16="http://schemas.microsoft.com/office/drawing/2014/main" id="{5A452466-1F5F-7810-500F-F787CFF7FAC5}"/>
+            </a:ext>
+          </a:extLst>
+        </p:cNvPr>
+        <p:cNvGrpSpPr/>
+        <p:nvPr/>
+      </p:nvGrpSpPr>
+      <p:grpSpPr>
+        <a:xfrm>
+          <a:off x="0" y="0"/>
+          <a:ext cx="0" cy="0"/>
+          <a:chOff x="0" y="0"/>
+          <a:chExt cx="0" cy="0"/>
+        </a:xfrm>
+      </p:grpSpPr>
+      <p:sp>
+        <p:nvSpPr>
+          <p:cNvPr id="57" name="TextBox 56">
+            <a:extLst>
+              <a:ext uri="{FF2B5EF4-FFF2-40B4-BE49-F238E27FC236}">
+                <a16:creationId xmlns:a16="http://schemas.microsoft.com/office/drawing/2014/main" id="{A7648BD4-B737-44BE-E221-5837F9C0EDBA}"/>
+              </a:ext>
+            </a:extLst>
+          </p:cNvPr>
+          <p:cNvSpPr txBox="1"/>
+          <p:nvPr/>
+        </p:nvSpPr>
+        <p:spPr>
+          <a:xfrm>
+            <a:off x="5605195" y="210966"/>
+            <a:ext cx="998991" cy="246221"/>
+          </a:xfrm>
+          <a:prstGeom prst="rect">
+            <a:avLst/>
+          </a:prstGeom>
+          <a:noFill/>
+        </p:spPr>
+        <p:txBody>
+          <a:bodyPr wrap="none" rtlCol="0">
+            <a:spAutoFit/>
+          </a:bodyPr>
+          <a:lstStyle/>
+          <a:p>
+            <a:r>
+              <a:rPr lang="ko-KR" altLang="en-US" sz="1000" dirty="0"/>
+              <a:t>모델 수행결과</a:t>
+            </a:r>
+          </a:p>
+        </p:txBody>
+      </p:sp>
+      <p:sp>
+        <p:nvSpPr>
+          <p:cNvPr id="64" name="TextBox 63">
+            <a:extLst>
+              <a:ext uri="{FF2B5EF4-FFF2-40B4-BE49-F238E27FC236}">
+                <a16:creationId xmlns:a16="http://schemas.microsoft.com/office/drawing/2014/main" id="{0117A6CA-EA65-56BD-D782-D439614D1096}"/>
+              </a:ext>
+            </a:extLst>
+          </p:cNvPr>
+          <p:cNvSpPr txBox="1"/>
+          <p:nvPr/>
+        </p:nvSpPr>
+        <p:spPr>
+          <a:xfrm>
+            <a:off x="7173588" y="159325"/>
+            <a:ext cx="565348" cy="369332"/>
+          </a:xfrm>
+          <a:prstGeom prst="rect">
+            <a:avLst/>
+          </a:prstGeom>
+          <a:noFill/>
+        </p:spPr>
+        <p:txBody>
+          <a:bodyPr wrap="none" rtlCol="0">
+            <a:spAutoFit/>
+          </a:bodyPr>
+          <a:lstStyle/>
+          <a:p>
+            <a:r>
+              <a:rPr lang="en-US" altLang="ko-KR" dirty="0"/>
+              <a:t>Roc</a:t>
+            </a:r>
+            <a:endParaRPr lang="ko-KR" altLang="en-US" dirty="0"/>
+          </a:p>
+        </p:txBody>
+      </p:sp>
+      <p:pic>
+        <p:nvPicPr>
+          <p:cNvPr id="3" name="그림 2">
+            <a:extLst>
+              <a:ext uri="{FF2B5EF4-FFF2-40B4-BE49-F238E27FC236}">
+                <a16:creationId xmlns:a16="http://schemas.microsoft.com/office/drawing/2014/main" id="{0F02FEA4-FD62-3258-7048-1F53A7D27B48}"/>
+              </a:ext>
+            </a:extLst>
+          </p:cNvPr>
+          <p:cNvPicPr>
+            <a:picLocks noChangeAspect="1"/>
+          </p:cNvPicPr>
+          <p:nvPr/>
+        </p:nvPicPr>
+        <p:blipFill>
+          <a:blip r:embed="rId2" cstate="hqprint">
+            <a:extLst>
+              <a:ext uri="{28A0092B-C50C-407E-A947-70E740481C1C}">
+                <a14:useLocalDpi xmlns:a14="http://schemas.microsoft.com/office/drawing/2010/main" val="0"/>
+              </a:ext>
+            </a:extLst>
+          </a:blip>
+          <a:stretch>
+            <a:fillRect/>
+          </a:stretch>
+        </p:blipFill>
+        <p:spPr>
+          <a:xfrm>
+            <a:off x="200995" y="528658"/>
+            <a:ext cx="11388749" cy="5839092"/>
           </a:xfrm>
           <a:prstGeom prst="rect">
             <a:avLst/>
@@ -7165,10 +8386,17 @@
   <p:clrMapOvr>
     <a:masterClrMapping/>
   </p:clrMapOvr>
+  <p:timing>
+    <p:tnLst>
+      <p:par>
+        <p:cTn id="1" dur="indefinite" restart="never" nodeType="tmRoot"/>
+      </p:par>
+    </p:tnLst>
+  </p:timing>
 </p:sld>
 </file>
 
-<file path=ppt/slides/slide7.xml><?xml version="1.0" encoding="utf-8"?>
+<file path=ppt/slides/slide8.xml><?xml version="1.0" encoding="utf-8"?>
 <p:sld xmlns:a="http://schemas.openxmlformats.org/drawingml/2006/main" xmlns:r="http://schemas.openxmlformats.org/officeDocument/2006/relationships" xmlns:p="http://schemas.openxmlformats.org/presentationml/2006/main">
   <p:cSld>
     <p:spTree>
@@ -7776,10 +9004,17 @@
   <p:clrMapOvr>
     <a:masterClrMapping/>
   </p:clrMapOvr>
+  <p:timing>
+    <p:tnLst>
+      <p:par>
+        <p:cTn id="1" dur="indefinite" restart="never" nodeType="tmRoot"/>
+      </p:par>
+    </p:tnLst>
+  </p:timing>
 </p:sld>
 </file>
 
-<file path=ppt/slides/slide8.xml><?xml version="1.0" encoding="utf-8"?>
+<file path=ppt/slides/slide9.xml><?xml version="1.0" encoding="utf-8"?>
 <p:sld xmlns:a="http://schemas.openxmlformats.org/drawingml/2006/main" xmlns:r="http://schemas.openxmlformats.org/officeDocument/2006/relationships" xmlns:p="http://schemas.openxmlformats.org/presentationml/2006/main">
   <p:cSld>
     <p:spTree>
@@ -8381,617 +9616,6 @@
     <p:extLst>
       <p:ext uri="{BB962C8B-B14F-4D97-AF65-F5344CB8AC3E}">
         <p14:creationId xmlns:p14="http://schemas.microsoft.com/office/powerpoint/2010/main" val="4230374650"/>
-      </p:ext>
-    </p:extLst>
-  </p:cSld>
-  <p:clrMapOvr>
-    <a:masterClrMapping/>
-  </p:clrMapOvr>
-</p:sld>
-</file>
-
-<file path=ppt/slides/slide9.xml><?xml version="1.0" encoding="utf-8"?>
-<p:sld xmlns:a="http://schemas.openxmlformats.org/drawingml/2006/main" xmlns:r="http://schemas.openxmlformats.org/officeDocument/2006/relationships" xmlns:p="http://schemas.openxmlformats.org/presentationml/2006/main">
-  <p:cSld>
-    <p:spTree>
-      <p:nvGrpSpPr>
-        <p:cNvPr id="1" name="">
-          <a:extLst>
-            <a:ext uri="{FF2B5EF4-FFF2-40B4-BE49-F238E27FC236}">
-              <a16:creationId xmlns:a16="http://schemas.microsoft.com/office/drawing/2014/main" id="{B5A1B226-C314-3CD6-9455-19768773A067}"/>
-            </a:ext>
-          </a:extLst>
-        </p:cNvPr>
-        <p:cNvGrpSpPr/>
-        <p:nvPr/>
-      </p:nvGrpSpPr>
-      <p:grpSpPr>
-        <a:xfrm>
-          <a:off x="0" y="0"/>
-          <a:ext cx="0" cy="0"/>
-          <a:chOff x="0" y="0"/>
-          <a:chExt cx="0" cy="0"/>
-        </a:xfrm>
-      </p:grpSpPr>
-      <p:pic>
-        <p:nvPicPr>
-          <p:cNvPr id="33" name="그림 32">
-            <a:extLst>
-              <a:ext uri="{FF2B5EF4-FFF2-40B4-BE49-F238E27FC236}">
-                <a16:creationId xmlns:a16="http://schemas.microsoft.com/office/drawing/2014/main" id="{0CA7AF1B-6E0D-6E51-C575-5CC005067983}"/>
-              </a:ext>
-            </a:extLst>
-          </p:cNvPr>
-          <p:cNvPicPr>
-            <a:picLocks noChangeAspect="1"/>
-          </p:cNvPicPr>
-          <p:nvPr/>
-        </p:nvPicPr>
-        <p:blipFill>
-          <a:blip r:embed="rId2" cstate="hqprint">
-            <a:extLst>
-              <a:ext uri="{28A0092B-C50C-407E-A947-70E740481C1C}">
-                <a14:useLocalDpi xmlns:a14="http://schemas.microsoft.com/office/drawing/2010/main" val="0"/>
-              </a:ext>
-            </a:extLst>
-          </a:blip>
-          <a:stretch>
-            <a:fillRect/>
-          </a:stretch>
-        </p:blipFill>
-        <p:spPr>
-          <a:xfrm>
-            <a:off x="201691" y="2642346"/>
-            <a:ext cx="2884409" cy="1882120"/>
-          </a:xfrm>
-          <a:prstGeom prst="rect">
-            <a:avLst/>
-          </a:prstGeom>
-        </p:spPr>
-      </p:pic>
-      <p:pic>
-        <p:nvPicPr>
-          <p:cNvPr id="39" name="그림 38">
-            <a:extLst>
-              <a:ext uri="{FF2B5EF4-FFF2-40B4-BE49-F238E27FC236}">
-                <a16:creationId xmlns:a16="http://schemas.microsoft.com/office/drawing/2014/main" id="{E4821260-5B77-4153-C580-29CAE4A155DB}"/>
-              </a:ext>
-            </a:extLst>
-          </p:cNvPr>
-          <p:cNvPicPr>
-            <a:picLocks noChangeAspect="1"/>
-          </p:cNvPicPr>
-          <p:nvPr/>
-        </p:nvPicPr>
-        <p:blipFill>
-          <a:blip r:embed="rId3" cstate="hqprint">
-            <a:extLst>
-              <a:ext uri="{28A0092B-C50C-407E-A947-70E740481C1C}">
-                <a14:useLocalDpi xmlns:a14="http://schemas.microsoft.com/office/drawing/2010/main" val="0"/>
-              </a:ext>
-            </a:extLst>
-          </a:blip>
-          <a:stretch>
-            <a:fillRect/>
-          </a:stretch>
-        </p:blipFill>
-        <p:spPr>
-          <a:xfrm>
-            <a:off x="4087945" y="2722936"/>
-            <a:ext cx="2884410" cy="1611922"/>
-          </a:xfrm>
-          <a:prstGeom prst="rect">
-            <a:avLst/>
-          </a:prstGeom>
-        </p:spPr>
-      </p:pic>
-      <p:pic>
-        <p:nvPicPr>
-          <p:cNvPr id="41" name="그림 40">
-            <a:extLst>
-              <a:ext uri="{FF2B5EF4-FFF2-40B4-BE49-F238E27FC236}">
-                <a16:creationId xmlns:a16="http://schemas.microsoft.com/office/drawing/2014/main" id="{553CF7CE-FE1D-FD0F-C7D8-FABE61A840BB}"/>
-              </a:ext>
-            </a:extLst>
-          </p:cNvPr>
-          <p:cNvPicPr>
-            <a:picLocks noChangeAspect="1"/>
-          </p:cNvPicPr>
-          <p:nvPr/>
-        </p:nvPicPr>
-        <p:blipFill>
-          <a:blip r:embed="rId4"/>
-          <a:stretch>
-            <a:fillRect/>
-          </a:stretch>
-        </p:blipFill>
-        <p:spPr>
-          <a:xfrm>
-            <a:off x="584538" y="508616"/>
-            <a:ext cx="1009791" cy="390580"/>
-          </a:xfrm>
-          <a:prstGeom prst="rect">
-            <a:avLst/>
-          </a:prstGeom>
-        </p:spPr>
-      </p:pic>
-      <p:sp>
-        <p:nvSpPr>
-          <p:cNvPr id="42" name="TextBox 41">
-            <a:extLst>
-              <a:ext uri="{FF2B5EF4-FFF2-40B4-BE49-F238E27FC236}">
-                <a16:creationId xmlns:a16="http://schemas.microsoft.com/office/drawing/2014/main" id="{C797A200-B448-42CC-2514-178A945092F5}"/>
-              </a:ext>
-            </a:extLst>
-          </p:cNvPr>
-          <p:cNvSpPr txBox="1"/>
-          <p:nvPr/>
-        </p:nvSpPr>
-        <p:spPr>
-          <a:xfrm>
-            <a:off x="524181" y="139284"/>
-            <a:ext cx="877163" cy="369332"/>
-          </a:xfrm>
-          <a:prstGeom prst="rect">
-            <a:avLst/>
-          </a:prstGeom>
-          <a:noFill/>
-        </p:spPr>
-        <p:txBody>
-          <a:bodyPr wrap="none" rtlCol="0">
-            <a:spAutoFit/>
-          </a:bodyPr>
-          <a:lstStyle/>
-          <a:p>
-            <a:r>
-              <a:rPr lang="ko-KR" altLang="en-US" dirty="0"/>
-              <a:t>업무명</a:t>
-            </a:r>
-          </a:p>
-        </p:txBody>
-      </p:sp>
-      <p:sp>
-        <p:nvSpPr>
-          <p:cNvPr id="43" name="TextBox 42">
-            <a:extLst>
-              <a:ext uri="{FF2B5EF4-FFF2-40B4-BE49-F238E27FC236}">
-                <a16:creationId xmlns:a16="http://schemas.microsoft.com/office/drawing/2014/main" id="{777054CC-A724-9A4C-19DC-8191C3A1B09C}"/>
-              </a:ext>
-            </a:extLst>
-          </p:cNvPr>
-          <p:cNvSpPr txBox="1"/>
-          <p:nvPr/>
-        </p:nvSpPr>
-        <p:spPr>
-          <a:xfrm>
-            <a:off x="584538" y="926199"/>
-            <a:ext cx="1285929" cy="369332"/>
-          </a:xfrm>
-          <a:prstGeom prst="rect">
-            <a:avLst/>
-          </a:prstGeom>
-          <a:noFill/>
-        </p:spPr>
-        <p:txBody>
-          <a:bodyPr wrap="none" rtlCol="0">
-            <a:spAutoFit/>
-          </a:bodyPr>
-          <a:lstStyle/>
-          <a:p>
-            <a:r>
-              <a:rPr lang="en-US" altLang="ko-KR" dirty="0"/>
-              <a:t>1.</a:t>
-            </a:r>
-            <a:r>
-              <a:rPr lang="ko-KR" altLang="en-US" dirty="0" err="1"/>
-              <a:t>산탄데르</a:t>
-            </a:r>
-            <a:endParaRPr lang="en-US" altLang="ko-KR" dirty="0"/>
-          </a:p>
-        </p:txBody>
-      </p:sp>
-      <p:pic>
-        <p:nvPicPr>
-          <p:cNvPr id="45" name="그림 44">
-            <a:extLst>
-              <a:ext uri="{FF2B5EF4-FFF2-40B4-BE49-F238E27FC236}">
-                <a16:creationId xmlns:a16="http://schemas.microsoft.com/office/drawing/2014/main" id="{AC2C9352-5603-1B0C-5C91-04900C0EB80F}"/>
-              </a:ext>
-            </a:extLst>
-          </p:cNvPr>
-          <p:cNvPicPr>
-            <a:picLocks noChangeAspect="1"/>
-          </p:cNvPicPr>
-          <p:nvPr/>
-        </p:nvPicPr>
-        <p:blipFill>
-          <a:blip r:embed="rId4"/>
-          <a:stretch>
-            <a:fillRect/>
-          </a:stretch>
-        </p:blipFill>
-        <p:spPr>
-          <a:xfrm>
-            <a:off x="3540326" y="497200"/>
-            <a:ext cx="1009791" cy="390580"/>
-          </a:xfrm>
-          <a:prstGeom prst="rect">
-            <a:avLst/>
-          </a:prstGeom>
-        </p:spPr>
-      </p:pic>
-      <p:sp>
-        <p:nvSpPr>
-          <p:cNvPr id="47" name="TextBox 46">
-            <a:extLst>
-              <a:ext uri="{FF2B5EF4-FFF2-40B4-BE49-F238E27FC236}">
-                <a16:creationId xmlns:a16="http://schemas.microsoft.com/office/drawing/2014/main" id="{051FE3CC-36AF-ACD1-D9F3-4CBAD71688E1}"/>
-              </a:ext>
-            </a:extLst>
-          </p:cNvPr>
-          <p:cNvSpPr txBox="1"/>
-          <p:nvPr/>
-        </p:nvSpPr>
-        <p:spPr>
-          <a:xfrm>
-            <a:off x="3479969" y="127868"/>
-            <a:ext cx="877163" cy="369332"/>
-          </a:xfrm>
-          <a:prstGeom prst="rect">
-            <a:avLst/>
-          </a:prstGeom>
-          <a:noFill/>
-        </p:spPr>
-        <p:txBody>
-          <a:bodyPr wrap="none" rtlCol="0">
-            <a:spAutoFit/>
-          </a:bodyPr>
-          <a:lstStyle/>
-          <a:p>
-            <a:r>
-              <a:rPr lang="ko-KR" altLang="en-US" dirty="0"/>
-              <a:t>모델명</a:t>
-            </a:r>
-          </a:p>
-        </p:txBody>
-      </p:sp>
-      <p:sp>
-        <p:nvSpPr>
-          <p:cNvPr id="49" name="TextBox 48">
-            <a:extLst>
-              <a:ext uri="{FF2B5EF4-FFF2-40B4-BE49-F238E27FC236}">
-                <a16:creationId xmlns:a16="http://schemas.microsoft.com/office/drawing/2014/main" id="{DA52A276-9A44-7532-F2E7-25F933F78367}"/>
-              </a:ext>
-            </a:extLst>
-          </p:cNvPr>
-          <p:cNvSpPr txBox="1"/>
-          <p:nvPr/>
-        </p:nvSpPr>
-        <p:spPr>
-          <a:xfrm>
-            <a:off x="3540326" y="914783"/>
-            <a:ext cx="1882247" cy="646331"/>
-          </a:xfrm>
-          <a:prstGeom prst="rect">
-            <a:avLst/>
-          </a:prstGeom>
-          <a:noFill/>
-        </p:spPr>
-        <p:txBody>
-          <a:bodyPr wrap="none" rtlCol="0">
-            <a:spAutoFit/>
-          </a:bodyPr>
-          <a:lstStyle/>
-          <a:p>
-            <a:r>
-              <a:rPr lang="en-US" altLang="ko-KR" dirty="0"/>
-              <a:t>4.RF</a:t>
-            </a:r>
-          </a:p>
-          <a:p>
-            <a:r>
-              <a:rPr lang="ko-KR" altLang="en-US" dirty="0"/>
-              <a:t>전체항목은 없음</a:t>
-            </a:r>
-          </a:p>
-        </p:txBody>
-      </p:sp>
-      <p:sp>
-        <p:nvSpPr>
-          <p:cNvPr id="51" name="TextBox 50">
-            <a:extLst>
-              <a:ext uri="{FF2B5EF4-FFF2-40B4-BE49-F238E27FC236}">
-                <a16:creationId xmlns:a16="http://schemas.microsoft.com/office/drawing/2014/main" id="{17CCE424-E54B-6A7F-F15A-31D643370069}"/>
-              </a:ext>
-            </a:extLst>
-          </p:cNvPr>
-          <p:cNvSpPr txBox="1"/>
-          <p:nvPr/>
-        </p:nvSpPr>
-        <p:spPr>
-          <a:xfrm>
-            <a:off x="5182212" y="433440"/>
-            <a:ext cx="1338828" cy="369332"/>
-          </a:xfrm>
-          <a:prstGeom prst="rect">
-            <a:avLst/>
-          </a:prstGeom>
-          <a:noFill/>
-        </p:spPr>
-        <p:txBody>
-          <a:bodyPr wrap="none" rtlCol="0">
-            <a:spAutoFit/>
-          </a:bodyPr>
-          <a:lstStyle/>
-          <a:p>
-            <a:r>
-              <a:rPr lang="ko-KR" altLang="en-US" dirty="0"/>
-              <a:t>전처리조회</a:t>
-            </a:r>
-          </a:p>
-        </p:txBody>
-      </p:sp>
-      <p:pic>
-        <p:nvPicPr>
-          <p:cNvPr id="53" name="그림 52">
-            <a:extLst>
-              <a:ext uri="{FF2B5EF4-FFF2-40B4-BE49-F238E27FC236}">
-                <a16:creationId xmlns:a16="http://schemas.microsoft.com/office/drawing/2014/main" id="{F5B93140-26CC-E46C-069D-B2A4296C0C9A}"/>
-              </a:ext>
-            </a:extLst>
-          </p:cNvPr>
-          <p:cNvPicPr>
-            <a:picLocks noChangeAspect="1"/>
-          </p:cNvPicPr>
-          <p:nvPr/>
-        </p:nvPicPr>
-        <p:blipFill>
-          <a:blip r:embed="rId5" cstate="hqprint">
-            <a:extLst>
-              <a:ext uri="{28A0092B-C50C-407E-A947-70E740481C1C}">
-                <a14:useLocalDpi xmlns:a14="http://schemas.microsoft.com/office/drawing/2010/main" val="0"/>
-              </a:ext>
-            </a:extLst>
-          </a:blip>
-          <a:stretch>
-            <a:fillRect/>
-          </a:stretch>
-        </p:blipFill>
-        <p:spPr>
-          <a:xfrm>
-            <a:off x="201691" y="4524466"/>
-            <a:ext cx="2884409" cy="2041556"/>
-          </a:xfrm>
-          <a:prstGeom prst="rect">
-            <a:avLst/>
-          </a:prstGeom>
-        </p:spPr>
-      </p:pic>
-      <p:pic>
-        <p:nvPicPr>
-          <p:cNvPr id="55" name="그림 54">
-            <a:extLst>
-              <a:ext uri="{FF2B5EF4-FFF2-40B4-BE49-F238E27FC236}">
-                <a16:creationId xmlns:a16="http://schemas.microsoft.com/office/drawing/2014/main" id="{D894951B-7CBB-41EF-CBF7-DCB3B6D8D234}"/>
-              </a:ext>
-            </a:extLst>
-          </p:cNvPr>
-          <p:cNvPicPr>
-            <a:picLocks noChangeAspect="1"/>
-          </p:cNvPicPr>
-          <p:nvPr/>
-        </p:nvPicPr>
-        <p:blipFill>
-          <a:blip r:embed="rId6" cstate="hqprint">
-            <a:extLst>
-              <a:ext uri="{28A0092B-C50C-407E-A947-70E740481C1C}">
-                <a14:useLocalDpi xmlns:a14="http://schemas.microsoft.com/office/drawing/2010/main" val="0"/>
-              </a:ext>
-            </a:extLst>
-          </a:blip>
-          <a:stretch>
-            <a:fillRect/>
-          </a:stretch>
-        </p:blipFill>
-        <p:spPr>
-          <a:xfrm>
-            <a:off x="4357132" y="4437229"/>
-            <a:ext cx="2615221" cy="2041557"/>
-          </a:xfrm>
-          <a:prstGeom prst="rect">
-            <a:avLst/>
-          </a:prstGeom>
-        </p:spPr>
-      </p:pic>
-      <p:sp>
-        <p:nvSpPr>
-          <p:cNvPr id="57" name="TextBox 56">
-            <a:extLst>
-              <a:ext uri="{FF2B5EF4-FFF2-40B4-BE49-F238E27FC236}">
-                <a16:creationId xmlns:a16="http://schemas.microsoft.com/office/drawing/2014/main" id="{85298108-A6C6-5D43-A38E-8B7FE49EA6C8}"/>
-              </a:ext>
-            </a:extLst>
-          </p:cNvPr>
-          <p:cNvSpPr txBox="1"/>
-          <p:nvPr/>
-        </p:nvSpPr>
-        <p:spPr>
-          <a:xfrm>
-            <a:off x="9195337" y="1586099"/>
-            <a:ext cx="1651414" cy="369332"/>
-          </a:xfrm>
-          <a:prstGeom prst="rect">
-            <a:avLst/>
-          </a:prstGeom>
-          <a:noFill/>
-        </p:spPr>
-        <p:txBody>
-          <a:bodyPr wrap="none" rtlCol="0">
-            <a:spAutoFit/>
-          </a:bodyPr>
-          <a:lstStyle/>
-          <a:p>
-            <a:r>
-              <a:rPr lang="ko-KR" altLang="en-US" dirty="0"/>
-              <a:t>모델 수행결과</a:t>
-            </a:r>
-          </a:p>
-        </p:txBody>
-      </p:sp>
-      <p:sp>
-        <p:nvSpPr>
-          <p:cNvPr id="58" name="TextBox 57">
-            <a:extLst>
-              <a:ext uri="{FF2B5EF4-FFF2-40B4-BE49-F238E27FC236}">
-                <a16:creationId xmlns:a16="http://schemas.microsoft.com/office/drawing/2014/main" id="{75797828-7CAC-06E0-B61A-B8FEFDC7E499}"/>
-              </a:ext>
-            </a:extLst>
-          </p:cNvPr>
-          <p:cNvSpPr txBox="1"/>
-          <p:nvPr/>
-        </p:nvSpPr>
-        <p:spPr>
-          <a:xfrm>
-            <a:off x="5107239" y="1514947"/>
-            <a:ext cx="2656496" cy="369332"/>
-          </a:xfrm>
-          <a:prstGeom prst="rect">
-            <a:avLst/>
-          </a:prstGeom>
-          <a:noFill/>
-        </p:spPr>
-        <p:txBody>
-          <a:bodyPr wrap="none" rtlCol="0">
-            <a:spAutoFit/>
-          </a:bodyPr>
-          <a:lstStyle/>
-          <a:p>
-            <a:r>
-              <a:rPr lang="ko-KR" altLang="en-US" dirty="0" err="1"/>
-              <a:t>전처리</a:t>
-            </a:r>
-            <a:r>
-              <a:rPr lang="ko-KR" altLang="en-US" dirty="0"/>
-              <a:t> 데이터 검증결과</a:t>
-            </a:r>
-          </a:p>
-        </p:txBody>
-      </p:sp>
-      <p:sp>
-        <p:nvSpPr>
-          <p:cNvPr id="61" name="TextBox 60">
-            <a:extLst>
-              <a:ext uri="{FF2B5EF4-FFF2-40B4-BE49-F238E27FC236}">
-                <a16:creationId xmlns:a16="http://schemas.microsoft.com/office/drawing/2014/main" id="{5D0F40CA-E4E4-F919-0D50-94CC73B67A8E}"/>
-              </a:ext>
-            </a:extLst>
-          </p:cNvPr>
-          <p:cNvSpPr txBox="1"/>
-          <p:nvPr/>
-        </p:nvSpPr>
-        <p:spPr>
-          <a:xfrm>
-            <a:off x="7763735" y="317500"/>
-            <a:ext cx="1651414" cy="369332"/>
-          </a:xfrm>
-          <a:prstGeom prst="rect">
-            <a:avLst/>
-          </a:prstGeom>
-          <a:noFill/>
-        </p:spPr>
-        <p:txBody>
-          <a:bodyPr wrap="none" rtlCol="0">
-            <a:spAutoFit/>
-          </a:bodyPr>
-          <a:lstStyle/>
-          <a:p>
-            <a:r>
-              <a:rPr lang="ko-KR" altLang="en-US" dirty="0" err="1"/>
-              <a:t>산탄데르</a:t>
-            </a:r>
-            <a:r>
-              <a:rPr lang="ko-KR" altLang="en-US" dirty="0"/>
-              <a:t> 기준</a:t>
-            </a:r>
-          </a:p>
-        </p:txBody>
-      </p:sp>
-      <p:sp>
-        <p:nvSpPr>
-          <p:cNvPr id="64" name="TextBox 63">
-            <a:extLst>
-              <a:ext uri="{FF2B5EF4-FFF2-40B4-BE49-F238E27FC236}">
-                <a16:creationId xmlns:a16="http://schemas.microsoft.com/office/drawing/2014/main" id="{91757298-2DC2-4EC0-063C-6B155978B008}"/>
-              </a:ext>
-            </a:extLst>
-          </p:cNvPr>
-          <p:cNvSpPr txBox="1"/>
-          <p:nvPr/>
-        </p:nvSpPr>
-        <p:spPr>
-          <a:xfrm>
-            <a:off x="9455696" y="2151347"/>
-            <a:ext cx="565348" cy="369332"/>
-          </a:xfrm>
-          <a:prstGeom prst="rect">
-            <a:avLst/>
-          </a:prstGeom>
-          <a:noFill/>
-        </p:spPr>
-        <p:txBody>
-          <a:bodyPr wrap="none" rtlCol="0">
-            <a:spAutoFit/>
-          </a:bodyPr>
-          <a:lstStyle/>
-          <a:p>
-            <a:r>
-              <a:rPr lang="en-US" altLang="ko-KR" dirty="0"/>
-              <a:t>Roc</a:t>
-            </a:r>
-            <a:endParaRPr lang="ko-KR" altLang="en-US" dirty="0"/>
-          </a:p>
-        </p:txBody>
-      </p:sp>
-      <p:pic>
-        <p:nvPicPr>
-          <p:cNvPr id="4" name="그림 3">
-            <a:extLst>
-              <a:ext uri="{FF2B5EF4-FFF2-40B4-BE49-F238E27FC236}">
-                <a16:creationId xmlns:a16="http://schemas.microsoft.com/office/drawing/2014/main" id="{E5F90F59-0FDF-C94E-8704-2404EE4AC01A}"/>
-              </a:ext>
-            </a:extLst>
-          </p:cNvPr>
-          <p:cNvPicPr>
-            <a:picLocks noChangeAspect="1"/>
-          </p:cNvPicPr>
-          <p:nvPr/>
-        </p:nvPicPr>
-        <p:blipFill>
-          <a:blip r:embed="rId7" cstate="hqprint">
-            <a:extLst>
-              <a:ext uri="{28A0092B-C50C-407E-A947-70E740481C1C}">
-                <a14:useLocalDpi xmlns:a14="http://schemas.microsoft.com/office/drawing/2010/main" val="0"/>
-              </a:ext>
-            </a:extLst>
-          </a:blip>
-          <a:stretch>
-            <a:fillRect/>
-          </a:stretch>
-        </p:blipFill>
-        <p:spPr>
-          <a:xfrm>
-            <a:off x="7726495" y="2916452"/>
-            <a:ext cx="3763220" cy="3216028"/>
-          </a:xfrm>
-          <a:prstGeom prst="rect">
-            <a:avLst/>
-          </a:prstGeom>
-        </p:spPr>
-      </p:pic>
-    </p:spTree>
-    <p:extLst>
-      <p:ext uri="{BB962C8B-B14F-4D97-AF65-F5344CB8AC3E}">
-        <p14:creationId xmlns:p14="http://schemas.microsoft.com/office/powerpoint/2010/main" val="1394182071"/>
       </p:ext>
     </p:extLst>
   </p:cSld>
